--- a/PPT/PT_AI_Client_Demo_v2.pptx
+++ b/PPT/PT_AI_Client_Demo_v2.pptx
@@ -4,6 +4,9 @@
   <p:sldMasterIdLst>
     <p:sldMasterId id="2147483648" r:id="rId1"/>
   </p:sldMasterIdLst>
+  <p:notesMasterIdLst>
+    <p:notesMasterId r:id="rId10"/>
+  </p:notesMasterIdLst>
   <p:sldIdLst>
     <p:sldId id="256" r:id="rId2"/>
     <p:sldId id="257" r:id="rId3"/>
@@ -14,10 +17,7 @@
     <p:sldId id="262" r:id="rId8"/>
     <p:sldId id="263" r:id="rId9"/>
   </p:sldIdLst>
-  <p:notesMasterIdLst>
-    <p:notesMasterId r:id="rId10"/>
-  </p:notesMasterIdLst>
-  <p:sldSz cx="9144000" cy="5143500"/>
+  <p:sldSz cx="9144000" cy="5143500" type="screen16x9"/>
   <p:notesSz cx="5143500" cy="9144000"/>
   <p:defaultTextStyle>
     <a:lvl1pPr marL="0" algn="l" defTabSz="914400" rtl="0" eaLnBrk="1" latinLnBrk="0" hangingPunct="1">
@@ -111,6 +111,11 @@
       </a:defRPr>
     </a:lvl9pPr>
   </p:defaultTextStyle>
+  <p:extLst>
+    <p:ext uri="{EFAFB233-063F-42B5-8137-9DF3F51BA10A}">
+      <p15:sldGuideLst xmlns:p15="http://schemas.microsoft.com/office/powerpoint/2012/main"/>
+    </p:ext>
+  </p:extLst>
 </p:presentation>
 </file>
 
@@ -136,234 +141,10 @@
           <a:chExt cx="0" cy="0"/>
         </a:xfrm>
       </p:grpSpPr>
-      <p:sp>
-        <p:nvSpPr>
-          <p:cNvPr id="2" name="Header Placeholder 1"/>
-          <p:cNvSpPr>
-            <a:spLocks noGrp="1"/>
-          </p:cNvSpPr>
-          <p:nvPr>
-            <p:ph type="hdr" sz="quarter"/>
-          </p:nvPr>
-        </p:nvSpPr>
-        <p:spPr>
-          <a:xfrm>
-            <a:off x="0" y="0"/>
-            <a:ext cx="2971800" cy="458788"/>
-          </a:xfrm>
-          <a:prstGeom prst="rect">
-            <a:avLst/>
-          </a:prstGeom>
-        </p:spPr>
-        <p:txBody>
-          <a:bodyPr vert="horz" lIns="91440" tIns="45720" rIns="91440" bIns="45720" rtlCol="0"/>
-          <a:lstStyle>
-            <a:lvl1pPr algn="l">
-              <a:defRPr sz="1200"/>
-            </a:lvl1pPr>
-          </a:lstStyle>
-          <a:p>
-            <a:endParaRPr lang="en-US"/>
-          </a:p>
-        </p:txBody>
-      </p:sp>
-      <p:sp>
-        <p:nvSpPr>
-          <p:cNvPr id="3" name="Date Placeholder 2"/>
-          <p:cNvSpPr>
-            <a:spLocks noGrp="1"/>
-          </p:cNvSpPr>
-          <p:nvPr>
-            <p:ph type="dt" idx="1"/>
-          </p:nvPr>
-        </p:nvSpPr>
-        <p:spPr>
-          <a:xfrm>
-            <a:off x="3884613" y="0"/>
-            <a:ext cx="2971800" cy="458788"/>
-          </a:xfrm>
-          <a:prstGeom prst="rect">
-            <a:avLst/>
-          </a:prstGeom>
-        </p:spPr>
-        <p:txBody>
-          <a:bodyPr vert="horz" lIns="91440" tIns="45720" rIns="91440" bIns="45720" rtlCol="0"/>
-          <a:lstStyle>
-            <a:lvl1pPr algn="r">
-              <a:defRPr sz="1200"/>
-            </a:lvl1pPr>
-          </a:lstStyle>
-          <a:p>
-            <a:fld id="{5282F153-3F37-0F45-9E97-73ACFA13230C}" type="datetimeFigureOut">
-              <a:rPr lang="en-US"/>
-              <a:t>7/23/19</a:t>
-            </a:fld>
-            <a:endParaRPr lang="en-US"/>
-          </a:p>
-        </p:txBody>
-      </p:sp>
-      <p:sp>
-        <p:nvSpPr>
-          <p:cNvPr id="4" name="Slide Image Placeholder 3"/>
-          <p:cNvSpPr>
-            <a:spLocks noGrp="1" noRot="1" noChangeAspect="1"/>
-          </p:cNvSpPr>
-          <p:nvPr>
-            <p:ph type="sldImg" idx="2"/>
-          </p:nvPr>
-        </p:nvSpPr>
-        <p:spPr>
-          <a:xfrm>
-            <a:off x="685800" y="1143000"/>
-            <a:ext cx="5486400" cy="3086100"/>
-          </a:xfrm>
-          <a:prstGeom prst="rect">
-            <a:avLst/>
-          </a:prstGeom>
-          <a:noFill/>
-          <a:ln w="12700">
-            <a:solidFill>
-              <a:prstClr val="black"/>
-            </a:solidFill>
-          </a:ln>
-        </p:spPr>
-        <p:txBody>
-          <a:bodyPr vert="horz" lIns="91440" tIns="45720" rIns="91440" bIns="45720" rtlCol="0" anchor="ctr"/>
-          <a:lstStyle/>
-          <a:p>
-            <a:endParaRPr lang="en-US"/>
-          </a:p>
-        </p:txBody>
-      </p:sp>
-      <p:sp>
-        <p:nvSpPr>
-          <p:cNvPr id="5" name="Notes Placeholder 4"/>
-          <p:cNvSpPr>
-            <a:spLocks noGrp="1"/>
-          </p:cNvSpPr>
-          <p:nvPr>
-            <p:ph type="body" sz="quarter" idx="3"/>
-          </p:nvPr>
-        </p:nvSpPr>
-        <p:spPr>
-          <a:xfrm>
-            <a:off x="685800" y="4400550"/>
-            <a:ext cx="5486400" cy="3600450"/>
-          </a:xfrm>
-          <a:prstGeom prst="rect">
-            <a:avLst/>
-          </a:prstGeom>
-        </p:spPr>
-        <p:txBody>
-          <a:bodyPr vert="horz" lIns="91440" tIns="45720" rIns="91440" bIns="45720" rtlCol="0"/>
-          <a:lstStyle/>
-          <a:p>
-            <a:pPr lvl="0"/>
-            <a:r>
-              <a:rPr lang="en-US"/>
-              <a:t>Click to edit Master text styles</a:t>
-            </a:r>
-          </a:p>
-          <a:p>
-            <a:pPr lvl="1"/>
-            <a:r>
-              <a:rPr lang="en-US"/>
-              <a:t>Second level</a:t>
-            </a:r>
-          </a:p>
-          <a:p>
-            <a:pPr lvl="2"/>
-            <a:r>
-              <a:rPr lang="en-US"/>
-              <a:t>Third level</a:t>
-            </a:r>
-          </a:p>
-          <a:p>
-            <a:pPr lvl="3"/>
-            <a:r>
-              <a:rPr lang="en-US"/>
-              <a:t>Fourth level</a:t>
-            </a:r>
-          </a:p>
-          <a:p>
-            <a:pPr lvl="4"/>
-            <a:r>
-              <a:rPr lang="en-US"/>
-              <a:t>Fifth level</a:t>
-            </a:r>
-          </a:p>
-        </p:txBody>
-      </p:sp>
-      <p:sp>
-        <p:nvSpPr>
-          <p:cNvPr id="6" name="Footer Placeholder 5"/>
-          <p:cNvSpPr>
-            <a:spLocks noGrp="1"/>
-          </p:cNvSpPr>
-          <p:nvPr>
-            <p:ph type="ftr" sz="quarter" idx="4"/>
-          </p:nvPr>
-        </p:nvSpPr>
-        <p:spPr>
-          <a:xfrm>
-            <a:off x="0" y="8685213"/>
-            <a:ext cx="2971800" cy="458787"/>
-          </a:xfrm>
-          <a:prstGeom prst="rect">
-            <a:avLst/>
-          </a:prstGeom>
-        </p:spPr>
-        <p:txBody>
-          <a:bodyPr vert="horz" lIns="91440" tIns="45720" rIns="91440" bIns="45720" rtlCol="0" anchor="b"/>
-          <a:lstStyle>
-            <a:lvl1pPr algn="l">
-              <a:defRPr sz="1200"/>
-            </a:lvl1pPr>
-          </a:lstStyle>
-          <a:p>
-            <a:endParaRPr lang="en-US"/>
-          </a:p>
-        </p:txBody>
-      </p:sp>
-      <p:sp>
-        <p:nvSpPr>
-          <p:cNvPr id="7" name="Slide Number Placeholder 6"/>
-          <p:cNvSpPr>
-            <a:spLocks noGrp="1"/>
-          </p:cNvSpPr>
-          <p:nvPr>
-            <p:ph type="sldNum" sz="quarter" idx="5"/>
-          </p:nvPr>
-        </p:nvSpPr>
-        <p:spPr>
-          <a:xfrm>
-            <a:off x="3884613" y="8685213"/>
-            <a:ext cx="2971800" cy="458787"/>
-          </a:xfrm>
-          <a:prstGeom prst="rect">
-            <a:avLst/>
-          </a:prstGeom>
-        </p:spPr>
-        <p:txBody>
-          <a:bodyPr vert="horz" lIns="91440" tIns="45720" rIns="91440" bIns="45720" rtlCol="0" anchor="b"/>
-          <a:lstStyle>
-            <a:lvl1pPr algn="r">
-              <a:defRPr sz="1200"/>
-            </a:lvl1pPr>
-          </a:lstStyle>
-          <a:p>
-            <a:fld id="{CE5E9CC1-C706-0F49-92D6-E571CC5EEA8F}" type="slidenum">
-              <a:rPr lang="en-US"/>
-              <a:t>‹#›</a:t>
-            </a:fld>
-            <a:endParaRPr lang="en-US"/>
-          </a:p>
-        </p:txBody>
-      </p:sp>
     </p:spTree>
     <p:extLst>
       <p:ext uri="{BB962C8B-B14F-4D97-AF65-F5344CB8AC3E}">
-        <p14:creationId xmlns:p14="http://schemas.microsoft.com/office/powerpoint/2010/main" val="1024086991"/>
+        <p14:creationId xmlns:p14="http://schemas.microsoft.com/office/powerpoint/2010/main" val="3220841771"/>
       </p:ext>
     </p:extLst>
   </p:cSld>
@@ -511,7 +292,6 @@
               <a:rPr lang="en-US" dirty="0"/>
               <a:t>Welcome the client. Today we walk through the PT AI pipeline with real findings from a live test run.</a:t>
             </a:r>
-            <a:endParaRPr lang="en-US" dirty="0"/>
           </a:p>
         </p:txBody>
       </p:sp>
@@ -599,7 +379,6 @@
               <a:rPr lang="en-US" dirty="0"/>
               <a:t>Ask the client how long their team spends on RCA today. This sets the stage.</a:t>
             </a:r>
-            <a:endParaRPr lang="en-US" dirty="0"/>
           </a:p>
         </p:txBody>
       </p:sp>
@@ -687,7 +466,6 @@
               <a:rPr lang="en-US" dirty="0"/>
               <a:t>Position as a force-multiplier — not replacing engineers, removing the drudgery.</a:t>
             </a:r>
-            <a:endParaRPr lang="en-US" dirty="0"/>
           </a:p>
         </p:txBody>
       </p:sp>
@@ -775,7 +553,6 @@
               <a:rPr lang="en-US" dirty="0"/>
               <a:t>Emphasise the watch-mode — just drop logs and get a report. No manual steps.</a:t>
             </a:r>
-            <a:endParaRPr lang="en-US" dirty="0"/>
           </a:p>
         </p:txBody>
       </p:sp>
@@ -863,7 +640,6 @@
               <a:rPr lang="en-US" dirty="0"/>
               <a:t>This is a real client run. Every finding is linked to actual log timestamps. Offer to walk through the HTML report.</a:t>
             </a:r>
-            <a:endParaRPr lang="en-US" dirty="0"/>
           </a:p>
         </p:txBody>
       </p:sp>
@@ -951,7 +727,6 @@
               <a:rPr lang="en-US" dirty="0"/>
               <a:t>Walk through the chain. Point out that this was generated automatically — no analyst wrote this. The AI connected BLG memory trend to SQL deadlocks to LR failures.</a:t>
             </a:r>
-            <a:endParaRPr lang="en-US" dirty="0"/>
           </a:p>
         </p:txBody>
       </p:sp>
@@ -1039,7 +814,6 @@
               <a:rPr lang="en-US" dirty="0"/>
               <a:t>Anchor on the 40% RCA reduction. Ask the client their current RCA cost per test cycle.</a:t>
             </a:r>
-            <a:endParaRPr lang="en-US" dirty="0"/>
           </a:p>
         </p:txBody>
       </p:sp>
@@ -1127,7 +901,6 @@
               <a:rPr lang="en-US" dirty="0"/>
               <a:t>Close strong — the CTA is more powerful now because the client just saw the pipeline catch real failures in their logs.</a:t>
             </a:r>
-            <a:endParaRPr lang="en-US" dirty="0"/>
           </a:p>
         </p:txBody>
       </p:sp>
@@ -1200,6 +973,11 @@
 <file path=ppt/slideMasters/slideMaster1.xml><?xml version="1.0" encoding="utf-8"?>
 <p:sldMaster xmlns:a="http://schemas.openxmlformats.org/drawingml/2006/main" xmlns:r="http://schemas.openxmlformats.org/officeDocument/2006/relationships" xmlns:p="http://schemas.openxmlformats.org/presentationml/2006/main">
   <p:cSld>
+    <p:bg>
+      <p:bgRef idx="1001">
+        <a:schemeClr val="bg1"/>
+      </p:bgRef>
+    </p:bg>
     <p:spTree>
       <p:nvGrpSpPr>
         <p:cNvPr id="1" name=""/>
@@ -1482,6 +1260,7 @@
         <a:solidFill>
           <a:srgbClr val="0A2342"/>
         </a:solidFill>
+        <a:effectLst/>
       </p:bgPr>
     </p:bg>
     <p:spTree>
@@ -1524,6 +1303,13 @@
             <a:prstDash val="solid"/>
           </a:ln>
         </p:spPr>
+        <p:txBody>
+          <a:bodyPr/>
+          <a:lstStyle/>
+          <a:p>
+            <a:endParaRPr lang="en-US"/>
+          </a:p>
+        </p:txBody>
       </p:sp>
       <p:sp>
         <p:nvSpPr>
@@ -1551,6 +1337,13 @@
             <a:prstDash val="solid"/>
           </a:ln>
         </p:spPr>
+        <p:txBody>
+          <a:bodyPr/>
+          <a:lstStyle/>
+          <a:p>
+            <a:endParaRPr lang="en-US"/>
+          </a:p>
+        </p:txBody>
       </p:sp>
       <p:sp>
         <p:nvSpPr>
@@ -1573,11 +1366,11 @@
           <a:bodyPr wrap="square" lIns="0" tIns="0" rIns="0" bIns="0" rtlCol="0" anchor="ctr"/>
           <a:lstStyle/>
           <a:p>
-            <a:pPr indent="0" marL="0">
-              <a:buNone/>
-            </a:pPr>
-            <a:r>
-              <a:rPr lang="en-US" sz="1100" b="1" spc="300" kern="0" dirty="0">
+            <a:pPr marL="0" indent="0">
+              <a:buNone/>
+            </a:pPr>
+            <a:r>
+              <a:rPr lang="en-US" sz="1100" b="1" kern="0" spc="300" dirty="0">
                 <a:solidFill>
                   <a:srgbClr val="5BC8E8"/>
                 </a:solidFill>
@@ -1609,7 +1402,7 @@
           <a:bodyPr wrap="square" lIns="0" tIns="0" rIns="0" bIns="0" rtlCol="0" anchor="ctr"/>
           <a:lstStyle/>
           <a:p>
-            <a:pPr indent="0" marL="0">
+            <a:pPr marL="0" indent="0">
               <a:buNone/>
             </a:pPr>
             <a:r>
@@ -1621,7 +1414,18 @@
                 <a:ea typeface="Cambria" pitchFamily="34" charset="-122"/>
                 <a:cs typeface="Cambria" pitchFamily="34" charset="-120"/>
               </a:rPr>
-              <a:t>PT AI Log Mining</a:t>
+              <a:t>PT AI Log </a:t>
+            </a:r>
+            <a:r>
+              <a:rPr lang="en-US" sz="5200" b="1">
+                <a:solidFill>
+                  <a:srgbClr val="FFFFFF"/>
+                </a:solidFill>
+                <a:latin typeface="Cambria" pitchFamily="34" charset="0"/>
+                <a:ea typeface="Cambria" pitchFamily="34" charset="-122"/>
+                <a:cs typeface="Cambria" pitchFamily="34" charset="-120"/>
+              </a:rPr>
+              <a:t>Analyser</a:t>
             </a:r>
             <a:endParaRPr lang="en-US" sz="5200" dirty="0"/>
           </a:p>
@@ -1648,7 +1452,7 @@
           <a:bodyPr wrap="square" lIns="0" tIns="0" rIns="0" bIns="0" rtlCol="0" anchor="ctr"/>
           <a:lstStyle/>
           <a:p>
-            <a:pPr indent="0" marL="0">
+            <a:pPr marL="0" indent="0">
               <a:buNone/>
             </a:pPr>
             <a:r>
@@ -1687,6 +1491,13 @@
             <a:prstDash val="solid"/>
           </a:ln>
         </p:spPr>
+        <p:txBody>
+          <a:bodyPr/>
+          <a:lstStyle/>
+          <a:p>
+            <a:endParaRPr lang="en-US"/>
+          </a:p>
+        </p:txBody>
       </p:sp>
       <p:sp>
         <p:nvSpPr>
@@ -1709,7 +1520,7 @@
           <a:bodyPr wrap="square" lIns="0" tIns="0" rIns="0" bIns="0" rtlCol="0" anchor="ctr"/>
           <a:lstStyle/>
           <a:p>
-            <a:pPr indent="0" marL="0">
+            <a:pPr marL="0" indent="0">
               <a:buNone/>
             </a:pPr>
             <a:r>
@@ -1726,14 +1537,14 @@
       </p:sp>
       <p:pic>
         <p:nvPicPr>
-          <p:cNvPr id="9" name="Image 0" descr="preencoded.png">    </p:cNvPr>
+          <p:cNvPr id="9" name="Image 0" descr="preencoded.png"/>
           <p:cNvPicPr>
             <a:picLocks noChangeAspect="1"/>
           </p:cNvPicPr>
           <p:nvPr/>
         </p:nvPicPr>
         <p:blipFill>
-          <a:blip r:embed="rId1"/>
+          <a:blip r:embed="rId3"/>
           <a:stretch>
             <a:fillRect/>
           </a:stretch>
@@ -1764,6 +1575,7 @@
         <a:solidFill>
           <a:srgbClr val="F0F7FA"/>
         </a:solidFill>
+        <a:effectLst/>
       </p:bgPr>
     </p:bg>
     <p:spTree>
@@ -1804,6 +1616,13 @@
             <a:prstDash val="solid"/>
           </a:ln>
         </p:spPr>
+        <p:txBody>
+          <a:bodyPr/>
+          <a:lstStyle/>
+          <a:p>
+            <a:endParaRPr lang="en-US"/>
+          </a:p>
+        </p:txBody>
       </p:sp>
       <p:sp>
         <p:nvSpPr>
@@ -1826,7 +1645,7 @@
           <a:bodyPr wrap="square" lIns="0" tIns="0" rIns="0" bIns="0" rtlCol="0" anchor="ctr"/>
           <a:lstStyle/>
           <a:p>
-            <a:pPr indent="0" marL="0">
+            <a:pPr marL="0" indent="0">
               <a:buNone/>
             </a:pPr>
             <a:r>
@@ -1865,7 +1684,7 @@
           <a:bodyPr wrap="square" lIns="0" tIns="0" rIns="0" bIns="0" rtlCol="0" anchor="ctr"/>
           <a:lstStyle/>
           <a:p>
-            <a:pPr indent="0" marL="0">
+            <a:pPr marL="0" indent="0">
               <a:buNone/>
             </a:pPr>
             <a:r>
@@ -1906,24 +1725,31 @@
             <a:prstDash val="solid"/>
           </a:ln>
           <a:effectLst>
-            <a:outerShdw sx="100000" sy="100000" kx="0" ky="0" algn="bl" rotWithShape="0" blurRad="101600" dist="38100" dir="2700000">
+            <a:outerShdw blurRad="101600" dist="38100" dir="2700000" algn="bl" rotWithShape="0">
               <a:srgbClr val="000000">
                 <a:alpha val="13000"/>
               </a:srgbClr>
             </a:outerShdw>
           </a:effectLst>
         </p:spPr>
+        <p:txBody>
+          <a:bodyPr/>
+          <a:lstStyle/>
+          <a:p>
+            <a:endParaRPr lang="en-US"/>
+          </a:p>
+        </p:txBody>
       </p:sp>
       <p:pic>
         <p:nvPicPr>
-          <p:cNvPr id="6" name="Image 0" descr="preencoded.png">    </p:cNvPr>
+          <p:cNvPr id="6" name="Image 0" descr="preencoded.png"/>
           <p:cNvPicPr>
             <a:picLocks noChangeAspect="1"/>
           </p:cNvPicPr>
           <p:nvPr/>
         </p:nvPicPr>
         <p:blipFill>
-          <a:blip r:embed="rId1"/>
+          <a:blip r:embed="rId3"/>
           <a:stretch>
             <a:fillRect/>
           </a:stretch>
@@ -1959,7 +1785,7 @@
           <a:bodyPr wrap="square" lIns="0" tIns="0" rIns="0" bIns="0" rtlCol="0" anchor="ctr"/>
           <a:lstStyle/>
           <a:p>
-            <a:pPr indent="0" marL="0">
+            <a:pPr marL="0" indent="0">
               <a:buNone/>
             </a:pPr>
             <a:r>
@@ -1995,7 +1821,7 @@
           <a:bodyPr wrap="square" lIns="0" tIns="0" rIns="0" bIns="0" rtlCol="0" anchor="ctr"/>
           <a:lstStyle/>
           <a:p>
-            <a:pPr indent="0" marL="0">
+            <a:pPr marL="0" indent="0">
               <a:buNone/>
             </a:pPr>
             <a:r>
@@ -2036,24 +1862,31 @@
             <a:prstDash val="solid"/>
           </a:ln>
           <a:effectLst>
-            <a:outerShdw sx="100000" sy="100000" kx="0" ky="0" algn="bl" rotWithShape="0" blurRad="101600" dist="38100" dir="2700000">
+            <a:outerShdw blurRad="101600" dist="38100" dir="2700000" algn="bl" rotWithShape="0">
               <a:srgbClr val="000000">
                 <a:alpha val="13000"/>
               </a:srgbClr>
             </a:outerShdw>
           </a:effectLst>
         </p:spPr>
+        <p:txBody>
+          <a:bodyPr/>
+          <a:lstStyle/>
+          <a:p>
+            <a:endParaRPr lang="en-US"/>
+          </a:p>
+        </p:txBody>
       </p:sp>
       <p:pic>
         <p:nvPicPr>
-          <p:cNvPr id="10" name="Image 1" descr="preencoded.png">    </p:cNvPr>
+          <p:cNvPr id="10" name="Image 1" descr="preencoded.png"/>
           <p:cNvPicPr>
             <a:picLocks noChangeAspect="1"/>
           </p:cNvPicPr>
           <p:nvPr/>
         </p:nvPicPr>
         <p:blipFill>
-          <a:blip r:embed="rId2"/>
+          <a:blip r:embed="rId4"/>
           <a:stretch>
             <a:fillRect/>
           </a:stretch>
@@ -2089,7 +1922,7 @@
           <a:bodyPr wrap="square" lIns="0" tIns="0" rIns="0" bIns="0" rtlCol="0" anchor="ctr"/>
           <a:lstStyle/>
           <a:p>
-            <a:pPr indent="0" marL="0">
+            <a:pPr marL="0" indent="0">
               <a:buNone/>
             </a:pPr>
             <a:r>
@@ -2125,7 +1958,7 @@
           <a:bodyPr wrap="square" lIns="0" tIns="0" rIns="0" bIns="0" rtlCol="0" anchor="ctr"/>
           <a:lstStyle/>
           <a:p>
-            <a:pPr indent="0" marL="0">
+            <a:pPr marL="0" indent="0">
               <a:buNone/>
             </a:pPr>
             <a:r>
@@ -2166,24 +1999,31 @@
             <a:prstDash val="solid"/>
           </a:ln>
           <a:effectLst>
-            <a:outerShdw sx="100000" sy="100000" kx="0" ky="0" algn="bl" rotWithShape="0" blurRad="101600" dist="38100" dir="2700000">
+            <a:outerShdw blurRad="101600" dist="38100" dir="2700000" algn="bl" rotWithShape="0">
               <a:srgbClr val="000000">
                 <a:alpha val="13000"/>
               </a:srgbClr>
             </a:outerShdw>
           </a:effectLst>
         </p:spPr>
+        <p:txBody>
+          <a:bodyPr/>
+          <a:lstStyle/>
+          <a:p>
+            <a:endParaRPr lang="en-US"/>
+          </a:p>
+        </p:txBody>
       </p:sp>
       <p:pic>
         <p:nvPicPr>
-          <p:cNvPr id="14" name="Image 2" descr="preencoded.png">    </p:cNvPr>
+          <p:cNvPr id="14" name="Image 2" descr="preencoded.png"/>
           <p:cNvPicPr>
             <a:picLocks noChangeAspect="1"/>
           </p:cNvPicPr>
           <p:nvPr/>
         </p:nvPicPr>
         <p:blipFill>
-          <a:blip r:embed="rId3"/>
+          <a:blip r:embed="rId5"/>
           <a:stretch>
             <a:fillRect/>
           </a:stretch>
@@ -2219,7 +2059,7 @@
           <a:bodyPr wrap="square" lIns="0" tIns="0" rIns="0" bIns="0" rtlCol="0" anchor="ctr"/>
           <a:lstStyle/>
           <a:p>
-            <a:pPr indent="0" marL="0">
+            <a:pPr marL="0" indent="0">
               <a:buNone/>
             </a:pPr>
             <a:r>
@@ -2255,7 +2095,7 @@
           <a:bodyPr wrap="square" lIns="0" tIns="0" rIns="0" bIns="0" rtlCol="0" anchor="ctr"/>
           <a:lstStyle/>
           <a:p>
-            <a:pPr indent="0" marL="0">
+            <a:pPr marL="0" indent="0">
               <a:buNone/>
             </a:pPr>
             <a:r>
@@ -2286,6 +2126,7 @@
         <a:solidFill>
           <a:srgbClr val="0A2342"/>
         </a:solidFill>
+        <a:effectLst/>
       </p:bgPr>
     </p:bg>
     <p:spTree>
@@ -2323,7 +2164,7 @@
           <a:bodyPr wrap="square" lIns="0" tIns="0" rIns="0" bIns="0" rtlCol="0" anchor="ctr"/>
           <a:lstStyle/>
           <a:p>
-            <a:pPr indent="0" marL="0">
+            <a:pPr marL="0" indent="0">
               <a:buNone/>
             </a:pPr>
             <a:r>
@@ -2362,7 +2203,7 @@
           <a:bodyPr wrap="square" lIns="0" tIns="0" rIns="0" bIns="0" rtlCol="0" anchor="ctr"/>
           <a:lstStyle/>
           <a:p>
-            <a:pPr indent="0" marL="0">
+            <a:pPr marL="0" indent="0">
               <a:buNone/>
             </a:pPr>
             <a:r>
@@ -2403,6 +2244,13 @@
             <a:prstDash val="solid"/>
           </a:ln>
         </p:spPr>
+        <p:txBody>
+          <a:bodyPr/>
+          <a:lstStyle/>
+          <a:p>
+            <a:endParaRPr lang="en-US"/>
+          </a:p>
+        </p:txBody>
       </p:sp>
       <p:sp>
         <p:nvSpPr>
@@ -2425,7 +2273,7 @@
           <a:bodyPr wrap="square" lIns="0" tIns="0" rIns="0" bIns="0" rtlCol="0" anchor="ctr"/>
           <a:lstStyle/>
           <a:p>
-            <a:pPr algn="ctr" indent="0" marL="0">
+            <a:pPr marL="0" indent="0" algn="ctr">
               <a:buNone/>
             </a:pPr>
             <a:r>
@@ -2434,7 +2282,7 @@
                   <a:srgbClr val="5BC8E8"/>
                 </a:solidFill>
               </a:rPr>
-              <a:t>40%</a:t>
+              <a:t>60%</a:t>
             </a:r>
             <a:endParaRPr lang="en-US" sz="3600" dirty="0"/>
           </a:p>
@@ -2461,7 +2309,7 @@
           <a:bodyPr wrap="square" lIns="0" tIns="0" rIns="0" bIns="0" rtlCol="0" anchor="ctr"/>
           <a:lstStyle/>
           <a:p>
-            <a:pPr algn="ctr" indent="0" marL="0">
+            <a:pPr marL="0" indent="0" algn="ctr">
               <a:buNone/>
             </a:pPr>
             <a:r>
@@ -2502,6 +2350,13 @@
             <a:prstDash val="solid"/>
           </a:ln>
         </p:spPr>
+        <p:txBody>
+          <a:bodyPr/>
+          <a:lstStyle/>
+          <a:p>
+            <a:endParaRPr lang="en-US"/>
+          </a:p>
+        </p:txBody>
       </p:sp>
       <p:sp>
         <p:nvSpPr>
@@ -2524,7 +2379,7 @@
           <a:bodyPr wrap="square" lIns="0" tIns="0" rIns="0" bIns="0" rtlCol="0" anchor="ctr"/>
           <a:lstStyle/>
           <a:p>
-            <a:pPr algn="ctr" indent="0" marL="0">
+            <a:pPr marL="0" indent="0" algn="ctr">
               <a:buNone/>
             </a:pPr>
             <a:r>
@@ -2560,7 +2415,7 @@
           <a:bodyPr wrap="square" lIns="0" tIns="0" rIns="0" bIns="0" rtlCol="0" anchor="ctr"/>
           <a:lstStyle/>
           <a:p>
-            <a:pPr algn="ctr" indent="0" marL="0">
+            <a:pPr marL="0" indent="0" algn="ctr">
               <a:buNone/>
             </a:pPr>
             <a:r>
@@ -2601,6 +2456,13 @@
             <a:prstDash val="solid"/>
           </a:ln>
         </p:spPr>
+        <p:txBody>
+          <a:bodyPr/>
+          <a:lstStyle/>
+          <a:p>
+            <a:endParaRPr lang="en-US"/>
+          </a:p>
+        </p:txBody>
       </p:sp>
       <p:sp>
         <p:nvSpPr>
@@ -2623,7 +2485,7 @@
           <a:bodyPr wrap="square" lIns="0" tIns="0" rIns="0" bIns="0" rtlCol="0" anchor="ctr"/>
           <a:lstStyle/>
           <a:p>
-            <a:pPr algn="ctr" indent="0" marL="0">
+            <a:pPr marL="0" indent="0" algn="ctr">
               <a:buNone/>
             </a:pPr>
             <a:r>
@@ -2659,7 +2521,7 @@
           <a:bodyPr wrap="square" lIns="0" tIns="0" rIns="0" bIns="0" rtlCol="0" anchor="ctr"/>
           <a:lstStyle/>
           <a:p>
-            <a:pPr algn="ctr" indent="0" marL="0">
+            <a:pPr marL="0" indent="0" algn="ctr">
               <a:buNone/>
             </a:pPr>
             <a:r>
@@ -2700,6 +2562,13 @@
             <a:prstDash val="solid"/>
           </a:ln>
         </p:spPr>
+        <p:txBody>
+          <a:bodyPr/>
+          <a:lstStyle/>
+          <a:p>
+            <a:endParaRPr lang="en-US"/>
+          </a:p>
+        </p:txBody>
       </p:sp>
       <p:sp>
         <p:nvSpPr>
@@ -2722,7 +2591,7 @@
           <a:bodyPr wrap="square" lIns="0" tIns="0" rIns="0" bIns="0" rtlCol="0" anchor="ctr"/>
           <a:lstStyle/>
           <a:p>
-            <a:pPr algn="ctr" indent="0" marL="0">
+            <a:pPr marL="0" indent="0" algn="ctr">
               <a:buNone/>
             </a:pPr>
             <a:r>
@@ -2758,7 +2627,7 @@
           <a:bodyPr wrap="square" lIns="0" tIns="0" rIns="0" bIns="0" rtlCol="0" anchor="ctr"/>
           <a:lstStyle/>
           <a:p>
-            <a:pPr algn="ctr" indent="0" marL="0">
+            <a:pPr marL="0" indent="0" algn="ctr">
               <a:buNone/>
             </a:pPr>
             <a:r>
@@ -2799,6 +2668,13 @@
             <a:prstDash val="solid"/>
           </a:ln>
         </p:spPr>
+        <p:txBody>
+          <a:bodyPr/>
+          <a:lstStyle/>
+          <a:p>
+            <a:endParaRPr lang="en-US"/>
+          </a:p>
+        </p:txBody>
       </p:sp>
       <p:sp>
         <p:nvSpPr>
@@ -2821,7 +2697,7 @@
           <a:bodyPr wrap="square" lIns="0" tIns="0" rIns="0" bIns="0" rtlCol="0" anchor="ctr"/>
           <a:lstStyle/>
           <a:p>
-            <a:pPr indent="0" marL="0">
+            <a:pPr marL="0" indent="0">
               <a:buNone/>
             </a:pPr>
             <a:r>
@@ -2832,9 +2708,6 @@
               </a:rPr>
               <a:t>PT AI Log Mining</a:t>
             </a:r>
-            <a:pPr indent="0" marL="0">
-              <a:buNone/>
-            </a:pPr>
             <a:r>
               <a:rPr lang="en-US" sz="1400" dirty="0">
                 <a:solidFill>
@@ -2843,9 +2716,6 @@
               </a:rPr>
               <a:t> automatically ingests Windows Performance Monitor (.BLG), IIS web server logs, and LoadRunner results. </a:t>
             </a:r>
-            <a:pPr indent="0" marL="0">
-              <a:buNone/>
-            </a:pPr>
             <a:r>
               <a:rPr lang="en-US" sz="1400" b="1" dirty="0">
                 <a:solidFill>
@@ -2854,9 +2724,6 @@
               </a:rPr>
               <a:t>Five specialized AI agents</a:t>
             </a:r>
-            <a:pPr indent="0" marL="0">
-              <a:buNone/>
-            </a:pPr>
             <a:r>
               <a:rPr lang="en-US" sz="1400" dirty="0">
                 <a:solidFill>
@@ -2885,6 +2752,7 @@
         <a:solidFill>
           <a:srgbClr val="F0F7FA"/>
         </a:solidFill>
+        <a:effectLst/>
       </p:bgPr>
     </p:bg>
     <p:spTree>
@@ -2925,6 +2793,13 @@
             <a:prstDash val="solid"/>
           </a:ln>
         </p:spPr>
+        <p:txBody>
+          <a:bodyPr/>
+          <a:lstStyle/>
+          <a:p>
+            <a:endParaRPr lang="en-US"/>
+          </a:p>
+        </p:txBody>
       </p:sp>
       <p:sp>
         <p:nvSpPr>
@@ -2947,7 +2822,7 @@
           <a:bodyPr wrap="square" lIns="0" tIns="0" rIns="0" bIns="0" rtlCol="0" anchor="ctr"/>
           <a:lstStyle/>
           <a:p>
-            <a:pPr indent="0" marL="0">
+            <a:pPr marL="0" indent="0">
               <a:buNone/>
             </a:pPr>
             <a:r>
@@ -2991,13 +2866,20 @@
             <a:prstDash val="solid"/>
           </a:ln>
           <a:effectLst>
-            <a:outerShdw sx="100000" sy="100000" kx="0" ky="0" algn="bl" rotWithShape="0" blurRad="127000" dist="38100" dir="2700000">
+            <a:outerShdw blurRad="127000" dist="38100" dir="2700000" algn="bl" rotWithShape="0">
               <a:srgbClr val="000000">
                 <a:alpha val="25000"/>
               </a:srgbClr>
             </a:outerShdw>
           </a:effectLst>
         </p:spPr>
+        <p:txBody>
+          <a:bodyPr/>
+          <a:lstStyle/>
+          <a:p>
+            <a:endParaRPr lang="en-US"/>
+          </a:p>
+        </p:txBody>
       </p:sp>
       <p:sp>
         <p:nvSpPr>
@@ -3023,17 +2905,24 @@
             <a:prstDash val="solid"/>
           </a:ln>
         </p:spPr>
+        <p:txBody>
+          <a:bodyPr/>
+          <a:lstStyle/>
+          <a:p>
+            <a:endParaRPr lang="en-US"/>
+          </a:p>
+        </p:txBody>
       </p:sp>
       <p:pic>
         <p:nvPicPr>
-          <p:cNvPr id="6" name="Image 0" descr="preencoded.png">    </p:cNvPr>
+          <p:cNvPr id="6" name="Image 0" descr="preencoded.png"/>
           <p:cNvPicPr>
             <a:picLocks noChangeAspect="1"/>
           </p:cNvPicPr>
           <p:nvPr/>
         </p:nvPicPr>
         <p:blipFill>
-          <a:blip r:embed="rId1"/>
+          <a:blip r:embed="rId3"/>
           <a:stretch>
             <a:fillRect/>
           </a:stretch>
@@ -3069,11 +2958,11 @@
           <a:bodyPr wrap="square" lIns="0" tIns="0" rIns="0" bIns="0" rtlCol="0" anchor="ctr"/>
           <a:lstStyle/>
           <a:p>
-            <a:pPr algn="ctr" indent="0" marL="0">
-              <a:buNone/>
-            </a:pPr>
-            <a:r>
-              <a:rPr lang="en-US" sz="1200" b="1" spc="150" kern="0" dirty="0">
+            <a:pPr marL="0" indent="0" algn="ctr">
+              <a:buNone/>
+            </a:pPr>
+            <a:r>
+              <a:rPr lang="en-US" sz="1200" b="1" kern="0" spc="150" dirty="0">
                 <a:solidFill>
                   <a:srgbClr val="5BC8E8"/>
                 </a:solidFill>
@@ -3110,6 +2999,13 @@
             <a:prstDash val="solid"/>
           </a:ln>
         </p:spPr>
+        <p:txBody>
+          <a:bodyPr/>
+          <a:lstStyle/>
+          <a:p>
+            <a:endParaRPr lang="en-US"/>
+          </a:p>
+        </p:txBody>
       </p:sp>
       <p:sp>
         <p:nvSpPr>
@@ -3132,7 +3028,7 @@
           <a:bodyPr wrap="square" lIns="0" tIns="0" rIns="0" bIns="0" rtlCol="0" anchor="t"/>
           <a:lstStyle/>
           <a:p>
-            <a:pPr algn="ctr" indent="0" marL="0">
+            <a:pPr marL="0" indent="0" algn="ctr">
               <a:buNone/>
             </a:pPr>
             <a:r>
@@ -3146,7 +3042,7 @@
             <a:endParaRPr lang="en-US" sz="1150" dirty="0"/>
           </a:p>
           <a:p>
-            <a:pPr algn="ctr" indent="0" marL="0">
+            <a:pPr marL="0" indent="0" algn="ctr">
               <a:buNone/>
             </a:pPr>
             <a:r>
@@ -3183,6 +3079,13 @@
             <a:prstDash val="solid"/>
           </a:ln>
         </p:spPr>
+        <p:txBody>
+          <a:bodyPr/>
+          <a:lstStyle/>
+          <a:p>
+            <a:endParaRPr lang="en-US"/>
+          </a:p>
+        </p:txBody>
       </p:sp>
       <p:sp>
         <p:nvSpPr>
@@ -3208,6 +3111,13 @@
             <a:prstDash val="solid"/>
           </a:ln>
         </p:spPr>
+        <p:txBody>
+          <a:bodyPr/>
+          <a:lstStyle/>
+          <a:p>
+            <a:endParaRPr lang="en-US"/>
+          </a:p>
+        </p:txBody>
       </p:sp>
       <p:sp>
         <p:nvSpPr>
@@ -3235,13 +3145,20 @@
             <a:prstDash val="solid"/>
           </a:ln>
           <a:effectLst>
-            <a:outerShdw sx="100000" sy="100000" kx="0" ky="0" algn="bl" rotWithShape="0" blurRad="127000" dist="38100" dir="2700000">
+            <a:outerShdw blurRad="127000" dist="38100" dir="2700000" algn="bl" rotWithShape="0">
               <a:srgbClr val="000000">
                 <a:alpha val="25000"/>
               </a:srgbClr>
             </a:outerShdw>
           </a:effectLst>
         </p:spPr>
+        <p:txBody>
+          <a:bodyPr/>
+          <a:lstStyle/>
+          <a:p>
+            <a:endParaRPr lang="en-US"/>
+          </a:p>
+        </p:txBody>
       </p:sp>
       <p:sp>
         <p:nvSpPr>
@@ -3267,17 +3184,24 @@
             <a:prstDash val="solid"/>
           </a:ln>
         </p:spPr>
+        <p:txBody>
+          <a:bodyPr/>
+          <a:lstStyle/>
+          <a:p>
+            <a:endParaRPr lang="en-US"/>
+          </a:p>
+        </p:txBody>
       </p:sp>
       <p:pic>
         <p:nvPicPr>
-          <p:cNvPr id="14" name="Image 1" descr="preencoded.png">    </p:cNvPr>
+          <p:cNvPr id="14" name="Image 1" descr="preencoded.png"/>
           <p:cNvPicPr>
             <a:picLocks noChangeAspect="1"/>
           </p:cNvPicPr>
           <p:nvPr/>
         </p:nvPicPr>
         <p:blipFill>
-          <a:blip r:embed="rId2"/>
+          <a:blip r:embed="rId4"/>
           <a:stretch>
             <a:fillRect/>
           </a:stretch>
@@ -3313,11 +3237,11 @@
           <a:bodyPr wrap="square" lIns="0" tIns="0" rIns="0" bIns="0" rtlCol="0" anchor="ctr"/>
           <a:lstStyle/>
           <a:p>
-            <a:pPr algn="ctr" indent="0" marL="0">
-              <a:buNone/>
-            </a:pPr>
-            <a:r>
-              <a:rPr lang="en-US" sz="1200" b="1" spc="150" kern="0" dirty="0">
+            <a:pPr marL="0" indent="0" algn="ctr">
+              <a:buNone/>
+            </a:pPr>
+            <a:r>
+              <a:rPr lang="en-US" sz="1200" b="1" kern="0" spc="150" dirty="0">
                 <a:solidFill>
                   <a:srgbClr val="5BC8E8"/>
                 </a:solidFill>
@@ -3354,6 +3278,13 @@
             <a:prstDash val="solid"/>
           </a:ln>
         </p:spPr>
+        <p:txBody>
+          <a:bodyPr/>
+          <a:lstStyle/>
+          <a:p>
+            <a:endParaRPr lang="en-US"/>
+          </a:p>
+        </p:txBody>
       </p:sp>
       <p:sp>
         <p:nvSpPr>
@@ -3376,7 +3307,7 @@
           <a:bodyPr wrap="square" lIns="0" tIns="0" rIns="0" bIns="0" rtlCol="0" anchor="t"/>
           <a:lstStyle/>
           <a:p>
-            <a:pPr algn="ctr" indent="0" marL="0">
+            <a:pPr marL="0" indent="0" algn="ctr">
               <a:buNone/>
             </a:pPr>
             <a:r>
@@ -3390,7 +3321,7 @@
             <a:endParaRPr lang="en-US" sz="1150" dirty="0"/>
           </a:p>
           <a:p>
-            <a:pPr algn="ctr" indent="0" marL="0">
+            <a:pPr marL="0" indent="0" algn="ctr">
               <a:buNone/>
             </a:pPr>
             <a:r>
@@ -3427,6 +3358,13 @@
             <a:prstDash val="solid"/>
           </a:ln>
         </p:spPr>
+        <p:txBody>
+          <a:bodyPr/>
+          <a:lstStyle/>
+          <a:p>
+            <a:endParaRPr lang="en-US"/>
+          </a:p>
+        </p:txBody>
       </p:sp>
       <p:sp>
         <p:nvSpPr>
@@ -3452,6 +3390,13 @@
             <a:prstDash val="solid"/>
           </a:ln>
         </p:spPr>
+        <p:txBody>
+          <a:bodyPr/>
+          <a:lstStyle/>
+          <a:p>
+            <a:endParaRPr lang="en-US"/>
+          </a:p>
+        </p:txBody>
       </p:sp>
       <p:sp>
         <p:nvSpPr>
@@ -3479,13 +3424,20 @@
             <a:prstDash val="solid"/>
           </a:ln>
           <a:effectLst>
-            <a:outerShdw sx="100000" sy="100000" kx="0" ky="0" algn="bl" rotWithShape="0" blurRad="127000" dist="38100" dir="2700000">
+            <a:outerShdw blurRad="127000" dist="38100" dir="2700000" algn="bl" rotWithShape="0">
               <a:srgbClr val="000000">
                 <a:alpha val="25000"/>
               </a:srgbClr>
             </a:outerShdw>
           </a:effectLst>
         </p:spPr>
+        <p:txBody>
+          <a:bodyPr/>
+          <a:lstStyle/>
+          <a:p>
+            <a:endParaRPr lang="en-US"/>
+          </a:p>
+        </p:txBody>
       </p:sp>
       <p:sp>
         <p:nvSpPr>
@@ -3511,17 +3463,24 @@
             <a:prstDash val="solid"/>
           </a:ln>
         </p:spPr>
+        <p:txBody>
+          <a:bodyPr/>
+          <a:lstStyle/>
+          <a:p>
+            <a:endParaRPr lang="en-US"/>
+          </a:p>
+        </p:txBody>
       </p:sp>
       <p:pic>
         <p:nvPicPr>
-          <p:cNvPr id="22" name="Image 2" descr="preencoded.png">    </p:cNvPr>
+          <p:cNvPr id="22" name="Image 2" descr="preencoded.png"/>
           <p:cNvPicPr>
             <a:picLocks noChangeAspect="1"/>
           </p:cNvPicPr>
           <p:nvPr/>
         </p:nvPicPr>
         <p:blipFill>
-          <a:blip r:embed="rId3"/>
+          <a:blip r:embed="rId5"/>
           <a:stretch>
             <a:fillRect/>
           </a:stretch>
@@ -3557,11 +3516,11 @@
           <a:bodyPr wrap="square" lIns="0" tIns="0" rIns="0" bIns="0" rtlCol="0" anchor="ctr"/>
           <a:lstStyle/>
           <a:p>
-            <a:pPr algn="ctr" indent="0" marL="0">
-              <a:buNone/>
-            </a:pPr>
-            <a:r>
-              <a:rPr lang="en-US" sz="1200" b="1" spc="150" kern="0" dirty="0">
+            <a:pPr marL="0" indent="0" algn="ctr">
+              <a:buNone/>
+            </a:pPr>
+            <a:r>
+              <a:rPr lang="en-US" sz="1200" b="1" kern="0" spc="150" dirty="0">
                 <a:solidFill>
                   <a:srgbClr val="5BC8E8"/>
                 </a:solidFill>
@@ -3598,6 +3557,13 @@
             <a:prstDash val="solid"/>
           </a:ln>
         </p:spPr>
+        <p:txBody>
+          <a:bodyPr/>
+          <a:lstStyle/>
+          <a:p>
+            <a:endParaRPr lang="en-US"/>
+          </a:p>
+        </p:txBody>
       </p:sp>
       <p:sp>
         <p:nvSpPr>
@@ -3620,7 +3586,7 @@
           <a:bodyPr wrap="square" lIns="0" tIns="0" rIns="0" bIns="0" rtlCol="0" anchor="t"/>
           <a:lstStyle/>
           <a:p>
-            <a:pPr algn="ctr" indent="0" marL="0">
+            <a:pPr marL="0" indent="0" algn="ctr">
               <a:buNone/>
             </a:pPr>
             <a:r>
@@ -3634,7 +3600,7 @@
             <a:endParaRPr lang="en-US" sz="1150" dirty="0"/>
           </a:p>
           <a:p>
-            <a:pPr algn="ctr" indent="0" marL="0">
+            <a:pPr marL="0" indent="0" algn="ctr">
               <a:buNone/>
             </a:pPr>
             <a:r>
@@ -3671,6 +3637,13 @@
             <a:prstDash val="solid"/>
           </a:ln>
         </p:spPr>
+        <p:txBody>
+          <a:bodyPr/>
+          <a:lstStyle/>
+          <a:p>
+            <a:endParaRPr lang="en-US"/>
+          </a:p>
+        </p:txBody>
       </p:sp>
       <p:sp>
         <p:nvSpPr>
@@ -3696,6 +3669,13 @@
             <a:prstDash val="solid"/>
           </a:ln>
         </p:spPr>
+        <p:txBody>
+          <a:bodyPr/>
+          <a:lstStyle/>
+          <a:p>
+            <a:endParaRPr lang="en-US"/>
+          </a:p>
+        </p:txBody>
       </p:sp>
       <p:sp>
         <p:nvSpPr>
@@ -3723,13 +3703,20 @@
             <a:prstDash val="solid"/>
           </a:ln>
           <a:effectLst>
-            <a:outerShdw sx="100000" sy="100000" kx="0" ky="0" algn="bl" rotWithShape="0" blurRad="127000" dist="38100" dir="2700000">
+            <a:outerShdw blurRad="127000" dist="38100" dir="2700000" algn="bl" rotWithShape="0">
               <a:srgbClr val="000000">
                 <a:alpha val="25000"/>
               </a:srgbClr>
             </a:outerShdw>
           </a:effectLst>
         </p:spPr>
+        <p:txBody>
+          <a:bodyPr/>
+          <a:lstStyle/>
+          <a:p>
+            <a:endParaRPr lang="en-US"/>
+          </a:p>
+        </p:txBody>
       </p:sp>
       <p:sp>
         <p:nvSpPr>
@@ -3755,17 +3742,24 @@
             <a:prstDash val="solid"/>
           </a:ln>
         </p:spPr>
+        <p:txBody>
+          <a:bodyPr/>
+          <a:lstStyle/>
+          <a:p>
+            <a:endParaRPr lang="en-US"/>
+          </a:p>
+        </p:txBody>
       </p:sp>
       <p:pic>
         <p:nvPicPr>
-          <p:cNvPr id="30" name="Image 3" descr="preencoded.png">    </p:cNvPr>
+          <p:cNvPr id="30" name="Image 3" descr="preencoded.png"/>
           <p:cNvPicPr>
             <a:picLocks noChangeAspect="1"/>
           </p:cNvPicPr>
           <p:nvPr/>
         </p:nvPicPr>
         <p:blipFill>
-          <a:blip r:embed="rId4"/>
+          <a:blip r:embed="rId6"/>
           <a:stretch>
             <a:fillRect/>
           </a:stretch>
@@ -3801,11 +3795,11 @@
           <a:bodyPr wrap="square" lIns="0" tIns="0" rIns="0" bIns="0" rtlCol="0" anchor="ctr"/>
           <a:lstStyle/>
           <a:p>
-            <a:pPr algn="ctr" indent="0" marL="0">
-              <a:buNone/>
-            </a:pPr>
-            <a:r>
-              <a:rPr lang="en-US" sz="1200" b="1" spc="150" kern="0" dirty="0">
+            <a:pPr marL="0" indent="0" algn="ctr">
+              <a:buNone/>
+            </a:pPr>
+            <a:r>
+              <a:rPr lang="en-US" sz="1200" b="1" kern="0" spc="150" dirty="0">
                 <a:solidFill>
                   <a:srgbClr val="5BC8E8"/>
                 </a:solidFill>
@@ -3842,6 +3836,13 @@
             <a:prstDash val="solid"/>
           </a:ln>
         </p:spPr>
+        <p:txBody>
+          <a:bodyPr/>
+          <a:lstStyle/>
+          <a:p>
+            <a:endParaRPr lang="en-US"/>
+          </a:p>
+        </p:txBody>
       </p:sp>
       <p:sp>
         <p:nvSpPr>
@@ -3864,7 +3865,7 @@
           <a:bodyPr wrap="square" lIns="0" tIns="0" rIns="0" bIns="0" rtlCol="0" anchor="t"/>
           <a:lstStyle/>
           <a:p>
-            <a:pPr algn="ctr" indent="0" marL="0">
+            <a:pPr marL="0" indent="0" algn="ctr">
               <a:buNone/>
             </a:pPr>
             <a:r>
@@ -3878,7 +3879,7 @@
             <a:endParaRPr lang="en-US" sz="1150" dirty="0"/>
           </a:p>
           <a:p>
-            <a:pPr algn="ctr" indent="0" marL="0">
+            <a:pPr marL="0" indent="0" algn="ctr">
               <a:buNone/>
             </a:pPr>
             <a:r>
@@ -3915,6 +3916,13 @@
             <a:prstDash val="solid"/>
           </a:ln>
         </p:spPr>
+        <p:txBody>
+          <a:bodyPr/>
+          <a:lstStyle/>
+          <a:p>
+            <a:endParaRPr lang="en-US"/>
+          </a:p>
+        </p:txBody>
       </p:sp>
       <p:sp>
         <p:nvSpPr>
@@ -3940,6 +3948,13 @@
             <a:prstDash val="solid"/>
           </a:ln>
         </p:spPr>
+        <p:txBody>
+          <a:bodyPr/>
+          <a:lstStyle/>
+          <a:p>
+            <a:endParaRPr lang="en-US"/>
+          </a:p>
+        </p:txBody>
       </p:sp>
       <p:sp>
         <p:nvSpPr>
@@ -3967,13 +3982,20 @@
             <a:prstDash val="solid"/>
           </a:ln>
           <a:effectLst>
-            <a:outerShdw sx="100000" sy="100000" kx="0" ky="0" algn="bl" rotWithShape="0" blurRad="127000" dist="38100" dir="2700000">
+            <a:outerShdw blurRad="127000" dist="38100" dir="2700000" algn="bl" rotWithShape="0">
               <a:srgbClr val="000000">
                 <a:alpha val="25000"/>
               </a:srgbClr>
             </a:outerShdw>
           </a:effectLst>
         </p:spPr>
+        <p:txBody>
+          <a:bodyPr/>
+          <a:lstStyle/>
+          <a:p>
+            <a:endParaRPr lang="en-US"/>
+          </a:p>
+        </p:txBody>
       </p:sp>
       <p:sp>
         <p:nvSpPr>
@@ -3999,17 +4021,24 @@
             <a:prstDash val="solid"/>
           </a:ln>
         </p:spPr>
+        <p:txBody>
+          <a:bodyPr/>
+          <a:lstStyle/>
+          <a:p>
+            <a:endParaRPr lang="en-US"/>
+          </a:p>
+        </p:txBody>
       </p:sp>
       <p:pic>
         <p:nvPicPr>
-          <p:cNvPr id="38" name="Image 4" descr="preencoded.png">    </p:cNvPr>
+          <p:cNvPr id="38" name="Image 4" descr="preencoded.png"/>
           <p:cNvPicPr>
             <a:picLocks noChangeAspect="1"/>
           </p:cNvPicPr>
           <p:nvPr/>
         </p:nvPicPr>
         <p:blipFill>
-          <a:blip r:embed="rId5"/>
+          <a:blip r:embed="rId7"/>
           <a:stretch>
             <a:fillRect/>
           </a:stretch>
@@ -4045,11 +4074,11 @@
           <a:bodyPr wrap="square" lIns="0" tIns="0" rIns="0" bIns="0" rtlCol="0" anchor="ctr"/>
           <a:lstStyle/>
           <a:p>
-            <a:pPr algn="ctr" indent="0" marL="0">
-              <a:buNone/>
-            </a:pPr>
-            <a:r>
-              <a:rPr lang="en-US" sz="1200" b="1" spc="150" kern="0" dirty="0">
+            <a:pPr marL="0" indent="0" algn="ctr">
+              <a:buNone/>
+            </a:pPr>
+            <a:r>
+              <a:rPr lang="en-US" sz="1200" b="1" kern="0" spc="150" dirty="0">
                 <a:solidFill>
                   <a:srgbClr val="5BC8E8"/>
                 </a:solidFill>
@@ -4086,6 +4115,13 @@
             <a:prstDash val="solid"/>
           </a:ln>
         </p:spPr>
+        <p:txBody>
+          <a:bodyPr/>
+          <a:lstStyle/>
+          <a:p>
+            <a:endParaRPr lang="en-US"/>
+          </a:p>
+        </p:txBody>
       </p:sp>
       <p:sp>
         <p:nvSpPr>
@@ -4108,7 +4144,7 @@
           <a:bodyPr wrap="square" lIns="0" tIns="0" rIns="0" bIns="0" rtlCol="0" anchor="t"/>
           <a:lstStyle/>
           <a:p>
-            <a:pPr algn="ctr" indent="0" marL="0">
+            <a:pPr marL="0" indent="0" algn="ctr">
               <a:buNone/>
             </a:pPr>
             <a:r>
@@ -4122,7 +4158,7 @@
             <a:endParaRPr lang="en-US" sz="1150" dirty="0"/>
           </a:p>
           <a:p>
-            <a:pPr algn="ctr" indent="0" marL="0">
+            <a:pPr marL="0" indent="0" algn="ctr">
               <a:buNone/>
             </a:pPr>
             <a:r>
@@ -4158,7 +4194,7 @@
           <a:bodyPr wrap="square" lIns="0" tIns="0" rIns="0" bIns="0" rtlCol="0" anchor="ctr"/>
           <a:lstStyle/>
           <a:p>
-            <a:pPr algn="ctr" indent="0" marL="0">
+            <a:pPr marL="0" indent="0" algn="ctr">
               <a:buNone/>
             </a:pPr>
             <a:r>
@@ -4189,6 +4225,7 @@
         <a:solidFill>
           <a:srgbClr val="F0F7FA"/>
         </a:solidFill>
+        <a:effectLst/>
       </p:bgPr>
     </p:bg>
     <p:spTree>
@@ -4229,6 +4266,13 @@
             <a:prstDash val="solid"/>
           </a:ln>
         </p:spPr>
+        <p:txBody>
+          <a:bodyPr/>
+          <a:lstStyle/>
+          <a:p>
+            <a:endParaRPr lang="en-US"/>
+          </a:p>
+        </p:txBody>
       </p:sp>
       <p:sp>
         <p:nvSpPr>
@@ -4251,7 +4295,7 @@
           <a:bodyPr wrap="square" lIns="0" tIns="0" rIns="0" bIns="0" rtlCol="0" anchor="ctr"/>
           <a:lstStyle/>
           <a:p>
-            <a:pPr indent="0" marL="0">
+            <a:pPr marL="0" indent="0">
               <a:buNone/>
             </a:pPr>
             <a:r>
@@ -4290,7 +4334,7 @@
           <a:bodyPr wrap="square" lIns="0" tIns="0" rIns="0" bIns="0" rtlCol="0" anchor="ctr"/>
           <a:lstStyle/>
           <a:p>
-            <a:pPr indent="0" marL="0">
+            <a:pPr marL="0" indent="0">
               <a:buNone/>
             </a:pPr>
             <a:r>
@@ -4331,6 +4375,13 @@
             <a:prstDash val="solid"/>
           </a:ln>
         </p:spPr>
+        <p:txBody>
+          <a:bodyPr/>
+          <a:lstStyle/>
+          <a:p>
+            <a:endParaRPr lang="en-US"/>
+          </a:p>
+        </p:txBody>
       </p:sp>
       <p:sp>
         <p:nvSpPr>
@@ -4353,7 +4404,7 @@
           <a:bodyPr wrap="square" lIns="0" tIns="0" rIns="0" bIns="0" rtlCol="0" anchor="ctr"/>
           <a:lstStyle/>
           <a:p>
-            <a:pPr algn="ctr" indent="0" marL="0">
+            <a:pPr marL="0" indent="0" algn="ctr">
               <a:buNone/>
             </a:pPr>
             <a:r>
@@ -4394,24 +4445,31 @@
             <a:prstDash val="solid"/>
           </a:ln>
           <a:effectLst>
-            <a:outerShdw sx="100000" sy="100000" kx="0" ky="0" algn="bl" rotWithShape="0" blurRad="101600" dist="38100" dir="2700000">
+            <a:outerShdw blurRad="101600" dist="38100" dir="2700000" algn="bl" rotWithShape="0">
               <a:srgbClr val="000000">
                 <a:alpha val="13000"/>
               </a:srgbClr>
             </a:outerShdw>
           </a:effectLst>
         </p:spPr>
+        <p:txBody>
+          <a:bodyPr/>
+          <a:lstStyle/>
+          <a:p>
+            <a:endParaRPr lang="en-US"/>
+          </a:p>
+        </p:txBody>
       </p:sp>
       <p:pic>
         <p:nvPicPr>
-          <p:cNvPr id="8" name="Image 0" descr="preencoded.png">    </p:cNvPr>
+          <p:cNvPr id="8" name="Image 0" descr="preencoded.png"/>
           <p:cNvPicPr>
             <a:picLocks noChangeAspect="1"/>
           </p:cNvPicPr>
           <p:nvPr/>
         </p:nvPicPr>
         <p:blipFill>
-          <a:blip r:embed="rId1"/>
+          <a:blip r:embed="rId3"/>
           <a:stretch>
             <a:fillRect/>
           </a:stretch>
@@ -4447,7 +4505,7 @@
           <a:bodyPr wrap="square" lIns="0" tIns="0" rIns="0" bIns="0" rtlCol="0" anchor="ctr"/>
           <a:lstStyle/>
           <a:p>
-            <a:pPr indent="0" marL="0">
+            <a:pPr marL="0" indent="0">
               <a:buNone/>
             </a:pPr>
             <a:r>
@@ -4483,7 +4541,7 @@
           <a:bodyPr wrap="square" lIns="0" tIns="0" rIns="0" bIns="0" rtlCol="0" anchor="ctr"/>
           <a:lstStyle/>
           <a:p>
-            <a:pPr indent="0" marL="0">
+            <a:pPr marL="0" indent="0">
               <a:buNone/>
             </a:pPr>
             <a:r>
@@ -4524,24 +4582,31 @@
             <a:prstDash val="solid"/>
           </a:ln>
           <a:effectLst>
-            <a:outerShdw sx="100000" sy="100000" kx="0" ky="0" algn="bl" rotWithShape="0" blurRad="101600" dist="38100" dir="2700000">
+            <a:outerShdw blurRad="101600" dist="38100" dir="2700000" algn="bl" rotWithShape="0">
               <a:srgbClr val="000000">
                 <a:alpha val="13000"/>
               </a:srgbClr>
             </a:outerShdw>
           </a:effectLst>
         </p:spPr>
+        <p:txBody>
+          <a:bodyPr/>
+          <a:lstStyle/>
+          <a:p>
+            <a:endParaRPr lang="en-US"/>
+          </a:p>
+        </p:txBody>
       </p:sp>
       <p:pic>
         <p:nvPicPr>
-          <p:cNvPr id="12" name="Image 1" descr="preencoded.png">    </p:cNvPr>
+          <p:cNvPr id="12" name="Image 1" descr="preencoded.png"/>
           <p:cNvPicPr>
             <a:picLocks noChangeAspect="1"/>
           </p:cNvPicPr>
           <p:nvPr/>
         </p:nvPicPr>
         <p:blipFill>
-          <a:blip r:embed="rId2"/>
+          <a:blip r:embed="rId4"/>
           <a:stretch>
             <a:fillRect/>
           </a:stretch>
@@ -4577,7 +4642,7 @@
           <a:bodyPr wrap="square" lIns="0" tIns="0" rIns="0" bIns="0" rtlCol="0" anchor="ctr"/>
           <a:lstStyle/>
           <a:p>
-            <a:pPr indent="0" marL="0">
+            <a:pPr marL="0" indent="0">
               <a:buNone/>
             </a:pPr>
             <a:r>
@@ -4613,7 +4678,7 @@
           <a:bodyPr wrap="square" lIns="0" tIns="0" rIns="0" bIns="0" rtlCol="0" anchor="ctr"/>
           <a:lstStyle/>
           <a:p>
-            <a:pPr indent="0" marL="0">
+            <a:pPr marL="0" indent="0">
               <a:buNone/>
             </a:pPr>
             <a:r>
@@ -4654,17 +4719,298 @@
             <a:prstDash val="solid"/>
           </a:ln>
           <a:effectLst>
-            <a:outerShdw sx="100000" sy="100000" kx="0" ky="0" algn="bl" rotWithShape="0" blurRad="101600" dist="38100" dir="2700000">
+            <a:outerShdw blurRad="101600" dist="38100" dir="2700000" algn="bl" rotWithShape="0">
               <a:srgbClr val="000000">
                 <a:alpha val="13000"/>
               </a:srgbClr>
             </a:outerShdw>
           </a:effectLst>
         </p:spPr>
+        <p:txBody>
+          <a:bodyPr/>
+          <a:lstStyle/>
+          <a:p>
+            <a:endParaRPr lang="en-US"/>
+          </a:p>
+        </p:txBody>
       </p:sp>
       <p:pic>
         <p:nvPicPr>
-          <p:cNvPr id="16" name="Image 2" descr="preencoded.png">    </p:cNvPr>
+          <p:cNvPr id="16" name="Image 2" descr="preencoded.png"/>
+          <p:cNvPicPr>
+            <a:picLocks noChangeAspect="1"/>
+          </p:cNvPicPr>
+          <p:nvPr/>
+        </p:nvPicPr>
+        <p:blipFill>
+          <a:blip r:embed="rId5"/>
+          <a:stretch>
+            <a:fillRect/>
+          </a:stretch>
+        </p:blipFill>
+        <p:spPr>
+          <a:xfrm>
+            <a:off x="6291072" y="1572768"/>
+            <a:ext cx="457200" cy="457200"/>
+          </a:xfrm>
+          <a:prstGeom prst="rect">
+            <a:avLst/>
+          </a:prstGeom>
+        </p:spPr>
+      </p:pic>
+      <p:sp>
+        <p:nvSpPr>
+          <p:cNvPr id="17" name="Text 12"/>
+          <p:cNvSpPr/>
+          <p:nvPr/>
+        </p:nvSpPr>
+        <p:spPr>
+          <a:xfrm>
+            <a:off x="6876288" y="1481328"/>
+            <a:ext cx="1828800" cy="566928"/>
+          </a:xfrm>
+          <a:prstGeom prst="rect">
+            <a:avLst/>
+          </a:prstGeom>
+          <a:noFill/>
+          <a:ln/>
+        </p:spPr>
+        <p:txBody>
+          <a:bodyPr wrap="square" lIns="0" tIns="0" rIns="0" bIns="0" rtlCol="0" anchor="ctr"/>
+          <a:lstStyle/>
+          <a:p>
+            <a:pPr marL="0" indent="0">
+              <a:buNone/>
+            </a:pPr>
+            <a:r>
+              <a:rPr lang="en-US" sz="3200" b="1" dirty="0">
+                <a:solidFill>
+                  <a:srgbClr val="0A2342"/>
+                </a:solidFill>
+              </a:rPr>
+              <a:t>990</a:t>
+            </a:r>
+            <a:endParaRPr lang="en-US" sz="3200" dirty="0"/>
+          </a:p>
+        </p:txBody>
+      </p:sp>
+      <p:sp>
+        <p:nvSpPr>
+          <p:cNvPr id="18" name="Text 13"/>
+          <p:cNvSpPr/>
+          <p:nvPr/>
+        </p:nvSpPr>
+        <p:spPr>
+          <a:xfrm>
+            <a:off x="6876288" y="2066544"/>
+            <a:ext cx="1828800" cy="347472"/>
+          </a:xfrm>
+          <a:prstGeom prst="rect">
+            <a:avLst/>
+          </a:prstGeom>
+          <a:noFill/>
+          <a:ln/>
+        </p:spPr>
+        <p:txBody>
+          <a:bodyPr wrap="square" lIns="0" tIns="0" rIns="0" bIns="0" rtlCol="0" anchor="ctr"/>
+          <a:lstStyle/>
+          <a:p>
+            <a:pPr marL="0" indent="0">
+              <a:buNone/>
+            </a:pPr>
+            <a:r>
+              <a:rPr lang="en-US" sz="1200" dirty="0">
+                <a:solidFill>
+                  <a:srgbClr val="3D5A6B"/>
+                </a:solidFill>
+              </a:rPr>
+              <a:t>Achieved TPS</a:t>
+            </a:r>
+            <a:endParaRPr lang="en-US" sz="1200" dirty="0"/>
+          </a:p>
+        </p:txBody>
+      </p:sp>
+      <p:sp>
+        <p:nvSpPr>
+          <p:cNvPr id="19" name="Shape 14"/>
+          <p:cNvSpPr/>
+          <p:nvPr/>
+        </p:nvSpPr>
+        <p:spPr>
+          <a:xfrm>
+            <a:off x="365760" y="2743200"/>
+            <a:ext cx="2743200" cy="1188720"/>
+          </a:xfrm>
+          <a:prstGeom prst="roundRect">
+            <a:avLst>
+              <a:gd name="adj" fmla="val 7692"/>
+            </a:avLst>
+          </a:prstGeom>
+          <a:solidFill>
+            <a:srgbClr val="FDECEA"/>
+          </a:solidFill>
+          <a:ln w="12700">
+            <a:solidFill>
+              <a:srgbClr val="E74C3C"/>
+            </a:solidFill>
+            <a:prstDash val="solid"/>
+          </a:ln>
+          <a:effectLst>
+            <a:outerShdw blurRad="101600" dist="38100" dir="2700000" algn="bl" rotWithShape="0">
+              <a:srgbClr val="000000">
+                <a:alpha val="13000"/>
+              </a:srgbClr>
+            </a:outerShdw>
+          </a:effectLst>
+        </p:spPr>
+        <p:txBody>
+          <a:bodyPr/>
+          <a:lstStyle/>
+          <a:p>
+            <a:endParaRPr lang="en-US"/>
+          </a:p>
+        </p:txBody>
+      </p:sp>
+      <p:pic>
+        <p:nvPicPr>
+          <p:cNvPr id="20" name="Image 3" descr="preencoded.png"/>
+          <p:cNvPicPr>
+            <a:picLocks noChangeAspect="1"/>
+          </p:cNvPicPr>
+          <p:nvPr/>
+        </p:nvPicPr>
+        <p:blipFill>
+          <a:blip r:embed="rId6"/>
+          <a:stretch>
+            <a:fillRect/>
+          </a:stretch>
+        </p:blipFill>
+        <p:spPr>
+          <a:xfrm>
+            <a:off x="530352" y="2898648"/>
+            <a:ext cx="457200" cy="457200"/>
+          </a:xfrm>
+          <a:prstGeom prst="rect">
+            <a:avLst/>
+          </a:prstGeom>
+        </p:spPr>
+      </p:pic>
+      <p:sp>
+        <p:nvSpPr>
+          <p:cNvPr id="21" name="Text 15"/>
+          <p:cNvSpPr/>
+          <p:nvPr/>
+        </p:nvSpPr>
+        <p:spPr>
+          <a:xfrm>
+            <a:off x="1115568" y="2807208"/>
+            <a:ext cx="1828800" cy="566928"/>
+          </a:xfrm>
+          <a:prstGeom prst="rect">
+            <a:avLst/>
+          </a:prstGeom>
+          <a:noFill/>
+          <a:ln/>
+        </p:spPr>
+        <p:txBody>
+          <a:bodyPr wrap="square" lIns="0" tIns="0" rIns="0" bIns="0" rtlCol="0" anchor="ctr"/>
+          <a:lstStyle/>
+          <a:p>
+            <a:pPr marL="0" indent="0">
+              <a:buNone/>
+            </a:pPr>
+            <a:r>
+              <a:rPr lang="en-US" sz="3200" b="1" dirty="0">
+                <a:solidFill>
+                  <a:srgbClr val="E74C3C"/>
+                </a:solidFill>
+              </a:rPr>
+              <a:t>97.9%</a:t>
+            </a:r>
+            <a:endParaRPr lang="en-US" sz="3200" dirty="0"/>
+          </a:p>
+        </p:txBody>
+      </p:sp>
+      <p:sp>
+        <p:nvSpPr>
+          <p:cNvPr id="22" name="Text 16"/>
+          <p:cNvSpPr/>
+          <p:nvPr/>
+        </p:nvSpPr>
+        <p:spPr>
+          <a:xfrm>
+            <a:off x="1115568" y="3392424"/>
+            <a:ext cx="1874520" cy="402336"/>
+          </a:xfrm>
+          <a:prstGeom prst="rect">
+            <a:avLst/>
+          </a:prstGeom>
+          <a:noFill/>
+          <a:ln/>
+        </p:spPr>
+        <p:txBody>
+          <a:bodyPr wrap="square" lIns="0" tIns="0" rIns="0" bIns="0" rtlCol="0" anchor="ctr"/>
+          <a:lstStyle/>
+          <a:p>
+            <a:pPr marL="0" indent="0">
+              <a:buNone/>
+            </a:pPr>
+            <a:r>
+              <a:rPr lang="en-US" sz="1050" dirty="0">
+                <a:solidFill>
+                  <a:srgbClr val="7B1A1A"/>
+                </a:solidFill>
+              </a:rPr>
+              <a:t>Peak CPU (threshold 85%)</a:t>
+            </a:r>
+            <a:endParaRPr lang="en-US" sz="1050" dirty="0"/>
+          </a:p>
+        </p:txBody>
+      </p:sp>
+      <p:sp>
+        <p:nvSpPr>
+          <p:cNvPr id="23" name="Shape 17"/>
+          <p:cNvSpPr/>
+          <p:nvPr/>
+        </p:nvSpPr>
+        <p:spPr>
+          <a:xfrm>
+            <a:off x="3246120" y="2743200"/>
+            <a:ext cx="2743200" cy="1188720"/>
+          </a:xfrm>
+          <a:prstGeom prst="roundRect">
+            <a:avLst>
+              <a:gd name="adj" fmla="val 7692"/>
+            </a:avLst>
+          </a:prstGeom>
+          <a:solidFill>
+            <a:srgbClr val="FDECEA"/>
+          </a:solidFill>
+          <a:ln w="12700">
+            <a:solidFill>
+              <a:srgbClr val="E74C3C"/>
+            </a:solidFill>
+            <a:prstDash val="solid"/>
+          </a:ln>
+          <a:effectLst>
+            <a:outerShdw blurRad="101600" dist="38100" dir="2700000" algn="bl" rotWithShape="0">
+              <a:srgbClr val="000000">
+                <a:alpha val="13000"/>
+              </a:srgbClr>
+            </a:outerShdw>
+          </a:effectLst>
+        </p:spPr>
+        <p:txBody>
+          <a:bodyPr/>
+          <a:lstStyle/>
+          <a:p>
+            <a:endParaRPr lang="en-US"/>
+          </a:p>
+        </p:txBody>
+      </p:sp>
+      <p:pic>
+        <p:nvPicPr>
+          <p:cNvPr id="24" name="Image 4" descr="preencoded.png"/>
           <p:cNvPicPr>
             <a:picLocks noChangeAspect="1"/>
           </p:cNvPicPr>
@@ -4678,7 +5024,7 @@
         </p:blipFill>
         <p:spPr>
           <a:xfrm>
-            <a:off x="6291072" y="1572768"/>
+            <a:off x="3410712" y="2898648"/>
             <a:ext cx="457200" cy="457200"/>
           </a:xfrm>
           <a:prstGeom prst="rect">
@@ -4688,13 +5034,13 @@
       </p:pic>
       <p:sp>
         <p:nvSpPr>
-          <p:cNvPr id="17" name="Text 12"/>
-          <p:cNvSpPr/>
-          <p:nvPr/>
-        </p:nvSpPr>
-        <p:spPr>
-          <a:xfrm>
-            <a:off x="6876288" y="1481328"/>
+          <p:cNvPr id="25" name="Text 18"/>
+          <p:cNvSpPr/>
+          <p:nvPr/>
+        </p:nvSpPr>
+        <p:spPr>
+          <a:xfrm>
+            <a:off x="3995928" y="2807208"/>
             <a:ext cx="1828800" cy="566928"/>
           </a:xfrm>
           <a:prstGeom prst="rect">
@@ -4707,16 +5053,16 @@
           <a:bodyPr wrap="square" lIns="0" tIns="0" rIns="0" bIns="0" rtlCol="0" anchor="ctr"/>
           <a:lstStyle/>
           <a:p>
-            <a:pPr indent="0" marL="0">
+            <a:pPr marL="0" indent="0">
               <a:buNone/>
             </a:pPr>
             <a:r>
               <a:rPr lang="en-US" sz="3200" b="1" dirty="0">
                 <a:solidFill>
-                  <a:srgbClr val="0A2342"/>
-                </a:solidFill>
-              </a:rPr>
-              <a:t>990</a:t>
+                  <a:srgbClr val="E74C3C"/>
+                </a:solidFill>
+              </a:rPr>
+              <a:t>98%</a:t>
             </a:r>
             <a:endParaRPr lang="en-US" sz="3200" dirty="0"/>
           </a:p>
@@ -4724,49 +5070,49 @@
       </p:sp>
       <p:sp>
         <p:nvSpPr>
-          <p:cNvPr id="18" name="Text 13"/>
-          <p:cNvSpPr/>
-          <p:nvPr/>
-        </p:nvSpPr>
-        <p:spPr>
-          <a:xfrm>
-            <a:off x="6876288" y="2066544"/>
-            <a:ext cx="1828800" cy="347472"/>
-          </a:xfrm>
-          <a:prstGeom prst="rect">
-            <a:avLst/>
-          </a:prstGeom>
-          <a:noFill/>
-          <a:ln/>
-        </p:spPr>
-        <p:txBody>
-          <a:bodyPr wrap="square" lIns="0" tIns="0" rIns="0" bIns="0" rtlCol="0" anchor="ctr"/>
-          <a:lstStyle/>
-          <a:p>
-            <a:pPr indent="0" marL="0">
-              <a:buNone/>
-            </a:pPr>
-            <a:r>
-              <a:rPr lang="en-US" sz="1200" dirty="0">
-                <a:solidFill>
-                  <a:srgbClr val="3D5A6B"/>
-                </a:solidFill>
-              </a:rPr>
-              <a:t>Achieved TPS</a:t>
-            </a:r>
-            <a:endParaRPr lang="en-US" sz="1200" dirty="0"/>
-          </a:p>
-        </p:txBody>
-      </p:sp>
-      <p:sp>
-        <p:nvSpPr>
-          <p:cNvPr id="19" name="Shape 14"/>
-          <p:cNvSpPr/>
-          <p:nvPr/>
-        </p:nvSpPr>
-        <p:spPr>
-          <a:xfrm>
-            <a:off x="365760" y="2743200"/>
+          <p:cNvPr id="26" name="Text 19"/>
+          <p:cNvSpPr/>
+          <p:nvPr/>
+        </p:nvSpPr>
+        <p:spPr>
+          <a:xfrm>
+            <a:off x="3995928" y="3392424"/>
+            <a:ext cx="1874520" cy="402336"/>
+          </a:xfrm>
+          <a:prstGeom prst="rect">
+            <a:avLst/>
+          </a:prstGeom>
+          <a:noFill/>
+          <a:ln/>
+        </p:spPr>
+        <p:txBody>
+          <a:bodyPr wrap="square" lIns="0" tIns="0" rIns="0" bIns="0" rtlCol="0" anchor="ctr"/>
+          <a:lstStyle/>
+          <a:p>
+            <a:pPr marL="0" indent="0">
+              <a:buNone/>
+            </a:pPr>
+            <a:r>
+              <a:rPr lang="en-US" sz="1050" dirty="0">
+                <a:solidFill>
+                  <a:srgbClr val="7B1A1A"/>
+                </a:solidFill>
+              </a:rPr>
+              <a:t>Memory (threshold 90%)</a:t>
+            </a:r>
+            <a:endParaRPr lang="en-US" sz="1050" dirty="0"/>
+          </a:p>
+        </p:txBody>
+      </p:sp>
+      <p:sp>
+        <p:nvSpPr>
+          <p:cNvPr id="27" name="Shape 20"/>
+          <p:cNvSpPr/>
+          <p:nvPr/>
+        </p:nvSpPr>
+        <p:spPr>
+          <a:xfrm>
+            <a:off x="6126480" y="2743200"/>
             <a:ext cx="2743200" cy="1188720"/>
           </a:xfrm>
           <a:prstGeom prst="roundRect">
@@ -4784,290 +5130,37 @@
             <a:prstDash val="solid"/>
           </a:ln>
           <a:effectLst>
-            <a:outerShdw sx="100000" sy="100000" kx="0" ky="0" algn="bl" rotWithShape="0" blurRad="101600" dist="38100" dir="2700000">
+            <a:outerShdw blurRad="101600" dist="38100" dir="2700000" algn="bl" rotWithShape="0">
               <a:srgbClr val="000000">
                 <a:alpha val="13000"/>
               </a:srgbClr>
             </a:outerShdw>
           </a:effectLst>
         </p:spPr>
+        <p:txBody>
+          <a:bodyPr/>
+          <a:lstStyle/>
+          <a:p>
+            <a:endParaRPr lang="en-US"/>
+          </a:p>
+        </p:txBody>
       </p:sp>
       <p:pic>
         <p:nvPicPr>
-          <p:cNvPr id="20" name="Image 3" descr="preencoded.png">    </p:cNvPr>
+          <p:cNvPr id="28" name="Image 5" descr="preencoded.png"/>
           <p:cNvPicPr>
             <a:picLocks noChangeAspect="1"/>
           </p:cNvPicPr>
           <p:nvPr/>
         </p:nvPicPr>
         <p:blipFill>
-          <a:blip r:embed="rId4"/>
+          <a:blip r:embed="rId7"/>
           <a:stretch>
             <a:fillRect/>
           </a:stretch>
         </p:blipFill>
         <p:spPr>
           <a:xfrm>
-            <a:off x="530352" y="2898648"/>
-            <a:ext cx="457200" cy="457200"/>
-          </a:xfrm>
-          <a:prstGeom prst="rect">
-            <a:avLst/>
-          </a:prstGeom>
-        </p:spPr>
-      </p:pic>
-      <p:sp>
-        <p:nvSpPr>
-          <p:cNvPr id="21" name="Text 15"/>
-          <p:cNvSpPr/>
-          <p:nvPr/>
-        </p:nvSpPr>
-        <p:spPr>
-          <a:xfrm>
-            <a:off x="1115568" y="2807208"/>
-            <a:ext cx="1828800" cy="566928"/>
-          </a:xfrm>
-          <a:prstGeom prst="rect">
-            <a:avLst/>
-          </a:prstGeom>
-          <a:noFill/>
-          <a:ln/>
-        </p:spPr>
-        <p:txBody>
-          <a:bodyPr wrap="square" lIns="0" tIns="0" rIns="0" bIns="0" rtlCol="0" anchor="ctr"/>
-          <a:lstStyle/>
-          <a:p>
-            <a:pPr indent="0" marL="0">
-              <a:buNone/>
-            </a:pPr>
-            <a:r>
-              <a:rPr lang="en-US" sz="3200" b="1" dirty="0">
-                <a:solidFill>
-                  <a:srgbClr val="E74C3C"/>
-                </a:solidFill>
-              </a:rPr>
-              <a:t>97.9%</a:t>
-            </a:r>
-            <a:endParaRPr lang="en-US" sz="3200" dirty="0"/>
-          </a:p>
-        </p:txBody>
-      </p:sp>
-      <p:sp>
-        <p:nvSpPr>
-          <p:cNvPr id="22" name="Text 16"/>
-          <p:cNvSpPr/>
-          <p:nvPr/>
-        </p:nvSpPr>
-        <p:spPr>
-          <a:xfrm>
-            <a:off x="1115568" y="3392424"/>
-            <a:ext cx="1874520" cy="402336"/>
-          </a:xfrm>
-          <a:prstGeom prst="rect">
-            <a:avLst/>
-          </a:prstGeom>
-          <a:noFill/>
-          <a:ln/>
-        </p:spPr>
-        <p:txBody>
-          <a:bodyPr wrap="square" lIns="0" tIns="0" rIns="0" bIns="0" rtlCol="0" anchor="ctr"/>
-          <a:lstStyle/>
-          <a:p>
-            <a:pPr indent="0" marL="0">
-              <a:buNone/>
-            </a:pPr>
-            <a:r>
-              <a:rPr lang="en-US" sz="1050" dirty="0">
-                <a:solidFill>
-                  <a:srgbClr val="7B1A1A"/>
-                </a:solidFill>
-              </a:rPr>
-              <a:t>Peak CPU (threshold 85%)</a:t>
-            </a:r>
-            <a:endParaRPr lang="en-US" sz="1050" dirty="0"/>
-          </a:p>
-        </p:txBody>
-      </p:sp>
-      <p:sp>
-        <p:nvSpPr>
-          <p:cNvPr id="23" name="Shape 17"/>
-          <p:cNvSpPr/>
-          <p:nvPr/>
-        </p:nvSpPr>
-        <p:spPr>
-          <a:xfrm>
-            <a:off x="3246120" y="2743200"/>
-            <a:ext cx="2743200" cy="1188720"/>
-          </a:xfrm>
-          <a:prstGeom prst="roundRect">
-            <a:avLst>
-              <a:gd name="adj" fmla="val 7692"/>
-            </a:avLst>
-          </a:prstGeom>
-          <a:solidFill>
-            <a:srgbClr val="FDECEA"/>
-          </a:solidFill>
-          <a:ln w="12700">
-            <a:solidFill>
-              <a:srgbClr val="E74C3C"/>
-            </a:solidFill>
-            <a:prstDash val="solid"/>
-          </a:ln>
-          <a:effectLst>
-            <a:outerShdw sx="100000" sy="100000" kx="0" ky="0" algn="bl" rotWithShape="0" blurRad="101600" dist="38100" dir="2700000">
-              <a:srgbClr val="000000">
-                <a:alpha val="13000"/>
-              </a:srgbClr>
-            </a:outerShdw>
-          </a:effectLst>
-        </p:spPr>
-      </p:sp>
-      <p:pic>
-        <p:nvPicPr>
-          <p:cNvPr id="24" name="Image 4" descr="preencoded.png">    </p:cNvPr>
-          <p:cNvPicPr>
-            <a:picLocks noChangeAspect="1"/>
-          </p:cNvPicPr>
-          <p:nvPr/>
-        </p:nvPicPr>
-        <p:blipFill>
-          <a:blip r:embed="rId5"/>
-          <a:stretch>
-            <a:fillRect/>
-          </a:stretch>
-        </p:blipFill>
-        <p:spPr>
-          <a:xfrm>
-            <a:off x="3410712" y="2898648"/>
-            <a:ext cx="457200" cy="457200"/>
-          </a:xfrm>
-          <a:prstGeom prst="rect">
-            <a:avLst/>
-          </a:prstGeom>
-        </p:spPr>
-      </p:pic>
-      <p:sp>
-        <p:nvSpPr>
-          <p:cNvPr id="25" name="Text 18"/>
-          <p:cNvSpPr/>
-          <p:nvPr/>
-        </p:nvSpPr>
-        <p:spPr>
-          <a:xfrm>
-            <a:off x="3995928" y="2807208"/>
-            <a:ext cx="1828800" cy="566928"/>
-          </a:xfrm>
-          <a:prstGeom prst="rect">
-            <a:avLst/>
-          </a:prstGeom>
-          <a:noFill/>
-          <a:ln/>
-        </p:spPr>
-        <p:txBody>
-          <a:bodyPr wrap="square" lIns="0" tIns="0" rIns="0" bIns="0" rtlCol="0" anchor="ctr"/>
-          <a:lstStyle/>
-          <a:p>
-            <a:pPr indent="0" marL="0">
-              <a:buNone/>
-            </a:pPr>
-            <a:r>
-              <a:rPr lang="en-US" sz="3200" b="1" dirty="0">
-                <a:solidFill>
-                  <a:srgbClr val="E74C3C"/>
-                </a:solidFill>
-              </a:rPr>
-              <a:t>98%</a:t>
-            </a:r>
-            <a:endParaRPr lang="en-US" sz="3200" dirty="0"/>
-          </a:p>
-        </p:txBody>
-      </p:sp>
-      <p:sp>
-        <p:nvSpPr>
-          <p:cNvPr id="26" name="Text 19"/>
-          <p:cNvSpPr/>
-          <p:nvPr/>
-        </p:nvSpPr>
-        <p:spPr>
-          <a:xfrm>
-            <a:off x="3995928" y="3392424"/>
-            <a:ext cx="1874520" cy="402336"/>
-          </a:xfrm>
-          <a:prstGeom prst="rect">
-            <a:avLst/>
-          </a:prstGeom>
-          <a:noFill/>
-          <a:ln/>
-        </p:spPr>
-        <p:txBody>
-          <a:bodyPr wrap="square" lIns="0" tIns="0" rIns="0" bIns="0" rtlCol="0" anchor="ctr"/>
-          <a:lstStyle/>
-          <a:p>
-            <a:pPr indent="0" marL="0">
-              <a:buNone/>
-            </a:pPr>
-            <a:r>
-              <a:rPr lang="en-US" sz="1050" dirty="0">
-                <a:solidFill>
-                  <a:srgbClr val="7B1A1A"/>
-                </a:solidFill>
-              </a:rPr>
-              <a:t>Memory (threshold 90%)</a:t>
-            </a:r>
-            <a:endParaRPr lang="en-US" sz="1050" dirty="0"/>
-          </a:p>
-        </p:txBody>
-      </p:sp>
-      <p:sp>
-        <p:nvSpPr>
-          <p:cNvPr id="27" name="Shape 20"/>
-          <p:cNvSpPr/>
-          <p:nvPr/>
-        </p:nvSpPr>
-        <p:spPr>
-          <a:xfrm>
-            <a:off x="6126480" y="2743200"/>
-            <a:ext cx="2743200" cy="1188720"/>
-          </a:xfrm>
-          <a:prstGeom prst="roundRect">
-            <a:avLst>
-              <a:gd name="adj" fmla="val 7692"/>
-            </a:avLst>
-          </a:prstGeom>
-          <a:solidFill>
-            <a:srgbClr val="FDECEA"/>
-          </a:solidFill>
-          <a:ln w="12700">
-            <a:solidFill>
-              <a:srgbClr val="E74C3C"/>
-            </a:solidFill>
-            <a:prstDash val="solid"/>
-          </a:ln>
-          <a:effectLst>
-            <a:outerShdw sx="100000" sy="100000" kx="0" ky="0" algn="bl" rotWithShape="0" blurRad="101600" dist="38100" dir="2700000">
-              <a:srgbClr val="000000">
-                <a:alpha val="13000"/>
-              </a:srgbClr>
-            </a:outerShdw>
-          </a:effectLst>
-        </p:spPr>
-      </p:sp>
-      <p:pic>
-        <p:nvPicPr>
-          <p:cNvPr id="28" name="Image 5" descr="preencoded.png">    </p:cNvPr>
-          <p:cNvPicPr>
-            <a:picLocks noChangeAspect="1"/>
-          </p:cNvPicPr>
-          <p:nvPr/>
-        </p:nvPicPr>
-        <p:blipFill>
-          <a:blip r:embed="rId6"/>
-          <a:stretch>
-            <a:fillRect/>
-          </a:stretch>
-        </p:blipFill>
-        <p:spPr>
-          <a:xfrm>
             <a:off x="6291072" y="2898648"/>
             <a:ext cx="457200" cy="457200"/>
           </a:xfrm>
@@ -5097,7 +5190,7 @@
           <a:bodyPr wrap="square" lIns="0" tIns="0" rIns="0" bIns="0" rtlCol="0" anchor="ctr"/>
           <a:lstStyle/>
           <a:p>
-            <a:pPr indent="0" marL="0">
+            <a:pPr marL="0" indent="0">
               <a:buNone/>
             </a:pPr>
             <a:r>
@@ -5133,7 +5226,7 @@
           <a:bodyPr wrap="square" lIns="0" tIns="0" rIns="0" bIns="0" rtlCol="0" anchor="ctr"/>
           <a:lstStyle/>
           <a:p>
-            <a:pPr indent="0" marL="0">
+            <a:pPr marL="0" indent="0">
               <a:buNone/>
             </a:pPr>
             <a:r>
@@ -5174,6 +5267,13 @@
             <a:prstDash val="solid"/>
           </a:ln>
         </p:spPr>
+        <p:txBody>
+          <a:bodyPr/>
+          <a:lstStyle/>
+          <a:p>
+            <a:endParaRPr lang="en-US"/>
+          </a:p>
+        </p:txBody>
       </p:sp>
       <p:sp>
         <p:nvSpPr>
@@ -5196,7 +5296,7 @@
           <a:bodyPr wrap="square" lIns="0" tIns="0" rIns="0" bIns="0" rtlCol="0" anchor="ctr"/>
           <a:lstStyle/>
           <a:p>
-            <a:pPr algn="ctr" indent="0" marL="0">
+            <a:pPr marL="0" indent="0" algn="ctr">
               <a:buNone/>
             </a:pPr>
             <a:r>
@@ -5235,6 +5335,13 @@
             <a:prstDash val="solid"/>
           </a:ln>
         </p:spPr>
+        <p:txBody>
+          <a:bodyPr/>
+          <a:lstStyle/>
+          <a:p>
+            <a:endParaRPr lang="en-US"/>
+          </a:p>
+        </p:txBody>
       </p:sp>
       <p:sp>
         <p:nvSpPr>
@@ -5257,7 +5364,7 @@
           <a:bodyPr wrap="square" lIns="0" tIns="0" rIns="0" bIns="0" rtlCol="0" anchor="ctr"/>
           <a:lstStyle/>
           <a:p>
-            <a:pPr algn="ctr" indent="0" marL="0">
+            <a:pPr marL="0" indent="0" algn="ctr">
               <a:buNone/>
             </a:pPr>
             <a:r>
@@ -5296,6 +5403,13 @@
             <a:prstDash val="solid"/>
           </a:ln>
         </p:spPr>
+        <p:txBody>
+          <a:bodyPr/>
+          <a:lstStyle/>
+          <a:p>
+            <a:endParaRPr lang="en-US"/>
+          </a:p>
+        </p:txBody>
       </p:sp>
       <p:sp>
         <p:nvSpPr>
@@ -5318,7 +5432,7 @@
           <a:bodyPr wrap="square" lIns="0" tIns="0" rIns="0" bIns="0" rtlCol="0" anchor="ctr"/>
           <a:lstStyle/>
           <a:p>
-            <a:pPr algn="ctr" indent="0" marL="0">
+            <a:pPr marL="0" indent="0" algn="ctr">
               <a:buNone/>
             </a:pPr>
             <a:r>
@@ -5357,6 +5471,13 @@
             <a:prstDash val="solid"/>
           </a:ln>
         </p:spPr>
+        <p:txBody>
+          <a:bodyPr/>
+          <a:lstStyle/>
+          <a:p>
+            <a:endParaRPr lang="en-US"/>
+          </a:p>
+        </p:txBody>
       </p:sp>
       <p:sp>
         <p:nvSpPr>
@@ -5379,7 +5500,7 @@
           <a:bodyPr wrap="square" lIns="0" tIns="0" rIns="0" bIns="0" rtlCol="0" anchor="ctr"/>
           <a:lstStyle/>
           <a:p>
-            <a:pPr algn="ctr" indent="0" marL="0">
+            <a:pPr marL="0" indent="0" algn="ctr">
               <a:buNone/>
             </a:pPr>
             <a:r>
@@ -5418,6 +5539,13 @@
             <a:prstDash val="solid"/>
           </a:ln>
         </p:spPr>
+        <p:txBody>
+          <a:bodyPr/>
+          <a:lstStyle/>
+          <a:p>
+            <a:endParaRPr lang="en-US"/>
+          </a:p>
+        </p:txBody>
       </p:sp>
       <p:sp>
         <p:nvSpPr>
@@ -5440,7 +5568,7 @@
           <a:bodyPr wrap="square" lIns="0" tIns="0" rIns="0" bIns="0" rtlCol="0" anchor="ctr"/>
           <a:lstStyle/>
           <a:p>
-            <a:pPr algn="ctr" indent="0" marL="0">
+            <a:pPr marL="0" indent="0" algn="ctr">
               <a:buNone/>
             </a:pPr>
             <a:r>
@@ -5471,6 +5599,7 @@
         <a:solidFill>
           <a:srgbClr val="0A2342"/>
         </a:solidFill>
+        <a:effectLst/>
       </p:bgPr>
     </p:bg>
     <p:spTree>
@@ -5508,7 +5637,7 @@
           <a:bodyPr wrap="square" lIns="0" tIns="0" rIns="0" bIns="0" rtlCol="0" anchor="ctr"/>
           <a:lstStyle/>
           <a:p>
-            <a:pPr indent="0" marL="0">
+            <a:pPr marL="0" indent="0">
               <a:buNone/>
             </a:pPr>
             <a:r>
@@ -5547,7 +5676,7 @@
           <a:bodyPr wrap="square" lIns="0" tIns="0" rIns="0" bIns="0" rtlCol="0" anchor="ctr"/>
           <a:lstStyle/>
           <a:p>
-            <a:pPr indent="0" marL="0">
+            <a:pPr marL="0" indent="0">
               <a:buNone/>
             </a:pPr>
             <a:r>
@@ -5588,6 +5717,13 @@
             <a:prstDash val="solid"/>
           </a:ln>
         </p:spPr>
+        <p:txBody>
+          <a:bodyPr/>
+          <a:lstStyle/>
+          <a:p>
+            <a:endParaRPr lang="en-US"/>
+          </a:p>
+        </p:txBody>
       </p:sp>
       <p:sp>
         <p:nvSpPr>
@@ -5613,6 +5749,13 @@
             <a:prstDash val="solid"/>
           </a:ln>
         </p:spPr>
+        <p:txBody>
+          <a:bodyPr/>
+          <a:lstStyle/>
+          <a:p>
+            <a:endParaRPr lang="en-US"/>
+          </a:p>
+        </p:txBody>
       </p:sp>
       <p:sp>
         <p:nvSpPr>
@@ -5635,7 +5778,7 @@
           <a:bodyPr wrap="square" lIns="0" tIns="0" rIns="0" bIns="0" rtlCol="0" anchor="ctr"/>
           <a:lstStyle/>
           <a:p>
-            <a:pPr algn="ctr" indent="0" marL="0">
+            <a:pPr marL="0" indent="0" algn="ctr">
               <a:buNone/>
             </a:pPr>
             <a:r>
@@ -5671,7 +5814,7 @@
           <a:bodyPr wrap="square" lIns="0" tIns="0" rIns="0" bIns="0" rtlCol="0" anchor="ctr"/>
           <a:lstStyle/>
           <a:p>
-            <a:pPr indent="0" marL="0">
+            <a:pPr marL="0" indent="0">
               <a:buNone/>
             </a:pPr>
             <a:r>
@@ -5712,6 +5855,13 @@
             <a:prstDash val="solid"/>
           </a:ln>
         </p:spPr>
+        <p:txBody>
+          <a:bodyPr/>
+          <a:lstStyle/>
+          <a:p>
+            <a:endParaRPr lang="en-US"/>
+          </a:p>
+        </p:txBody>
       </p:sp>
       <p:sp>
         <p:nvSpPr>
@@ -5734,7 +5884,7 @@
           <a:bodyPr wrap="square" lIns="0" tIns="0" rIns="0" bIns="0" rtlCol="0" anchor="ctr"/>
           <a:lstStyle/>
           <a:p>
-            <a:pPr algn="ctr" indent="0" marL="0">
+            <a:pPr marL="0" indent="0" algn="ctr">
               <a:buNone/>
             </a:pPr>
             <a:r>
@@ -5770,7 +5920,7 @@
           <a:bodyPr wrap="square" lIns="0" tIns="0" rIns="0" bIns="0" rtlCol="0" anchor="ctr"/>
           <a:lstStyle/>
           <a:p>
-            <a:pPr indent="0" marL="0">
+            <a:pPr marL="0" indent="0">
               <a:buNone/>
             </a:pPr>
             <a:r>
@@ -5807,6 +5957,13 @@
             <a:prstDash val="dash"/>
           </a:ln>
         </p:spPr>
+        <p:txBody>
+          <a:bodyPr/>
+          <a:lstStyle/>
+          <a:p>
+            <a:endParaRPr lang="en-US"/>
+          </a:p>
+        </p:txBody>
       </p:sp>
       <p:sp>
         <p:nvSpPr>
@@ -5834,6 +5991,13 @@
             <a:prstDash val="solid"/>
           </a:ln>
         </p:spPr>
+        <p:txBody>
+          <a:bodyPr/>
+          <a:lstStyle/>
+          <a:p>
+            <a:endParaRPr lang="en-US"/>
+          </a:p>
+        </p:txBody>
       </p:sp>
       <p:sp>
         <p:nvSpPr>
@@ -5859,6 +6023,13 @@
             <a:prstDash val="solid"/>
           </a:ln>
         </p:spPr>
+        <p:txBody>
+          <a:bodyPr/>
+          <a:lstStyle/>
+          <a:p>
+            <a:endParaRPr lang="en-US"/>
+          </a:p>
+        </p:txBody>
       </p:sp>
       <p:sp>
         <p:nvSpPr>
@@ -5881,7 +6052,7 @@
           <a:bodyPr wrap="square" lIns="0" tIns="0" rIns="0" bIns="0" rtlCol="0" anchor="ctr"/>
           <a:lstStyle/>
           <a:p>
-            <a:pPr algn="ctr" indent="0" marL="0">
+            <a:pPr marL="0" indent="0" algn="ctr">
               <a:buNone/>
             </a:pPr>
             <a:r>
@@ -5917,7 +6088,7 @@
           <a:bodyPr wrap="square" lIns="0" tIns="0" rIns="0" bIns="0" rtlCol="0" anchor="ctr"/>
           <a:lstStyle/>
           <a:p>
-            <a:pPr indent="0" marL="0">
+            <a:pPr marL="0" indent="0">
               <a:buNone/>
             </a:pPr>
             <a:r>
@@ -5958,6 +6129,13 @@
             <a:prstDash val="solid"/>
           </a:ln>
         </p:spPr>
+        <p:txBody>
+          <a:bodyPr/>
+          <a:lstStyle/>
+          <a:p>
+            <a:endParaRPr lang="en-US"/>
+          </a:p>
+        </p:txBody>
       </p:sp>
       <p:sp>
         <p:nvSpPr>
@@ -5980,7 +6158,7 @@
           <a:bodyPr wrap="square" lIns="0" tIns="0" rIns="0" bIns="0" rtlCol="0" anchor="ctr"/>
           <a:lstStyle/>
           <a:p>
-            <a:pPr algn="ctr" indent="0" marL="0">
+            <a:pPr marL="0" indent="0" algn="ctr">
               <a:buNone/>
             </a:pPr>
             <a:r>
@@ -6016,7 +6194,7 @@
           <a:bodyPr wrap="square" lIns="0" tIns="0" rIns="0" bIns="0" rtlCol="0" anchor="ctr"/>
           <a:lstStyle/>
           <a:p>
-            <a:pPr indent="0" marL="0">
+            <a:pPr marL="0" indent="0">
               <a:buNone/>
             </a:pPr>
             <a:r>
@@ -6053,6 +6231,13 @@
             <a:prstDash val="dash"/>
           </a:ln>
         </p:spPr>
+        <p:txBody>
+          <a:bodyPr/>
+          <a:lstStyle/>
+          <a:p>
+            <a:endParaRPr lang="en-US"/>
+          </a:p>
+        </p:txBody>
       </p:sp>
       <p:sp>
         <p:nvSpPr>
@@ -6080,6 +6265,13 @@
             <a:prstDash val="solid"/>
           </a:ln>
         </p:spPr>
+        <p:txBody>
+          <a:bodyPr/>
+          <a:lstStyle/>
+          <a:p>
+            <a:endParaRPr lang="en-US"/>
+          </a:p>
+        </p:txBody>
       </p:sp>
       <p:sp>
         <p:nvSpPr>
@@ -6105,6 +6297,13 @@
             <a:prstDash val="solid"/>
           </a:ln>
         </p:spPr>
+        <p:txBody>
+          <a:bodyPr/>
+          <a:lstStyle/>
+          <a:p>
+            <a:endParaRPr lang="en-US"/>
+          </a:p>
+        </p:txBody>
       </p:sp>
       <p:sp>
         <p:nvSpPr>
@@ -6127,7 +6326,7 @@
           <a:bodyPr wrap="square" lIns="0" tIns="0" rIns="0" bIns="0" rtlCol="0" anchor="ctr"/>
           <a:lstStyle/>
           <a:p>
-            <a:pPr algn="ctr" indent="0" marL="0">
+            <a:pPr marL="0" indent="0" algn="ctr">
               <a:buNone/>
             </a:pPr>
             <a:r>
@@ -6163,7 +6362,7 @@
           <a:bodyPr wrap="square" lIns="0" tIns="0" rIns="0" bIns="0" rtlCol="0" anchor="ctr"/>
           <a:lstStyle/>
           <a:p>
-            <a:pPr indent="0" marL="0">
+            <a:pPr marL="0" indent="0">
               <a:buNone/>
             </a:pPr>
             <a:r>
@@ -6204,6 +6403,13 @@
             <a:prstDash val="solid"/>
           </a:ln>
         </p:spPr>
+        <p:txBody>
+          <a:bodyPr/>
+          <a:lstStyle/>
+          <a:p>
+            <a:endParaRPr lang="en-US"/>
+          </a:p>
+        </p:txBody>
       </p:sp>
       <p:sp>
         <p:nvSpPr>
@@ -6226,7 +6432,7 @@
           <a:bodyPr wrap="square" lIns="0" tIns="0" rIns="0" bIns="0" rtlCol="0" anchor="ctr"/>
           <a:lstStyle/>
           <a:p>
-            <a:pPr algn="ctr" indent="0" marL="0">
+            <a:pPr marL="0" indent="0" algn="ctr">
               <a:buNone/>
             </a:pPr>
             <a:r>
@@ -6262,7 +6468,7 @@
           <a:bodyPr wrap="square" lIns="0" tIns="0" rIns="0" bIns="0" rtlCol="0" anchor="ctr"/>
           <a:lstStyle/>
           <a:p>
-            <a:pPr indent="0" marL="0">
+            <a:pPr marL="0" indent="0">
               <a:buNone/>
             </a:pPr>
             <a:r>
@@ -6299,6 +6505,13 @@
             <a:prstDash val="dash"/>
           </a:ln>
         </p:spPr>
+        <p:txBody>
+          <a:bodyPr/>
+          <a:lstStyle/>
+          <a:p>
+            <a:endParaRPr lang="en-US"/>
+          </a:p>
+        </p:txBody>
       </p:sp>
       <p:sp>
         <p:nvSpPr>
@@ -6326,6 +6539,13 @@
             <a:prstDash val="solid"/>
           </a:ln>
         </p:spPr>
+        <p:txBody>
+          <a:bodyPr/>
+          <a:lstStyle/>
+          <a:p>
+            <a:endParaRPr lang="en-US"/>
+          </a:p>
+        </p:txBody>
       </p:sp>
       <p:sp>
         <p:nvSpPr>
@@ -6351,6 +6571,13 @@
             <a:prstDash val="solid"/>
           </a:ln>
         </p:spPr>
+        <p:txBody>
+          <a:bodyPr/>
+          <a:lstStyle/>
+          <a:p>
+            <a:endParaRPr lang="en-US"/>
+          </a:p>
+        </p:txBody>
       </p:sp>
       <p:sp>
         <p:nvSpPr>
@@ -6373,7 +6600,7 @@
           <a:bodyPr wrap="square" lIns="0" tIns="0" rIns="0" bIns="0" rtlCol="0" anchor="ctr"/>
           <a:lstStyle/>
           <a:p>
-            <a:pPr algn="ctr" indent="0" marL="0">
+            <a:pPr marL="0" indent="0" algn="ctr">
               <a:buNone/>
             </a:pPr>
             <a:r>
@@ -6409,7 +6636,7 @@
           <a:bodyPr wrap="square" lIns="0" tIns="0" rIns="0" bIns="0" rtlCol="0" anchor="ctr"/>
           <a:lstStyle/>
           <a:p>
-            <a:pPr indent="0" marL="0">
+            <a:pPr marL="0" indent="0">
               <a:buNone/>
             </a:pPr>
             <a:r>
@@ -6450,6 +6677,13 @@
             <a:prstDash val="solid"/>
           </a:ln>
         </p:spPr>
+        <p:txBody>
+          <a:bodyPr/>
+          <a:lstStyle/>
+          <a:p>
+            <a:endParaRPr lang="en-US"/>
+          </a:p>
+        </p:txBody>
       </p:sp>
       <p:sp>
         <p:nvSpPr>
@@ -6472,7 +6706,7 @@
           <a:bodyPr wrap="square" lIns="0" tIns="0" rIns="0" bIns="0" rtlCol="0" anchor="ctr"/>
           <a:lstStyle/>
           <a:p>
-            <a:pPr algn="ctr" indent="0" marL="0">
+            <a:pPr marL="0" indent="0" algn="ctr">
               <a:buNone/>
             </a:pPr>
             <a:r>
@@ -6508,7 +6742,7 @@
           <a:bodyPr wrap="square" lIns="0" tIns="0" rIns="0" bIns="0" rtlCol="0" anchor="ctr"/>
           <a:lstStyle/>
           <a:p>
-            <a:pPr indent="0" marL="0">
+            <a:pPr marL="0" indent="0">
               <a:buNone/>
             </a:pPr>
             <a:r>
@@ -6545,6 +6779,13 @@
             <a:prstDash val="dash"/>
           </a:ln>
         </p:spPr>
+        <p:txBody>
+          <a:bodyPr/>
+          <a:lstStyle/>
+          <a:p>
+            <a:endParaRPr lang="en-US"/>
+          </a:p>
+        </p:txBody>
       </p:sp>
       <p:sp>
         <p:nvSpPr>
@@ -6572,6 +6813,13 @@
             <a:prstDash val="solid"/>
           </a:ln>
         </p:spPr>
+        <p:txBody>
+          <a:bodyPr/>
+          <a:lstStyle/>
+          <a:p>
+            <a:endParaRPr lang="en-US"/>
+          </a:p>
+        </p:txBody>
       </p:sp>
       <p:sp>
         <p:nvSpPr>
@@ -6597,6 +6845,13 @@
             <a:prstDash val="solid"/>
           </a:ln>
         </p:spPr>
+        <p:txBody>
+          <a:bodyPr/>
+          <a:lstStyle/>
+          <a:p>
+            <a:endParaRPr lang="en-US"/>
+          </a:p>
+        </p:txBody>
       </p:sp>
       <p:sp>
         <p:nvSpPr>
@@ -6619,7 +6874,7 @@
           <a:bodyPr wrap="square" lIns="0" tIns="0" rIns="0" bIns="0" rtlCol="0" anchor="ctr"/>
           <a:lstStyle/>
           <a:p>
-            <a:pPr algn="ctr" indent="0" marL="0">
+            <a:pPr marL="0" indent="0" algn="ctr">
               <a:buNone/>
             </a:pPr>
             <a:r>
@@ -6655,7 +6910,7 @@
           <a:bodyPr wrap="square" lIns="0" tIns="0" rIns="0" bIns="0" rtlCol="0" anchor="ctr"/>
           <a:lstStyle/>
           <a:p>
-            <a:pPr indent="0" marL="0">
+            <a:pPr marL="0" indent="0">
               <a:buNone/>
             </a:pPr>
             <a:r>
@@ -6696,6 +6951,13 @@
             <a:prstDash val="solid"/>
           </a:ln>
         </p:spPr>
+        <p:txBody>
+          <a:bodyPr/>
+          <a:lstStyle/>
+          <a:p>
+            <a:endParaRPr lang="en-US"/>
+          </a:p>
+        </p:txBody>
       </p:sp>
       <p:sp>
         <p:nvSpPr>
@@ -6718,7 +6980,7 @@
           <a:bodyPr wrap="square" lIns="0" tIns="0" rIns="0" bIns="0" rtlCol="0" anchor="ctr"/>
           <a:lstStyle/>
           <a:p>
-            <a:pPr algn="ctr" indent="0" marL="0">
+            <a:pPr marL="0" indent="0" algn="ctr">
               <a:buNone/>
             </a:pPr>
             <a:r>
@@ -6754,7 +7016,7 @@
           <a:bodyPr wrap="square" lIns="0" tIns="0" rIns="0" bIns="0" rtlCol="0" anchor="ctr"/>
           <a:lstStyle/>
           <a:p>
-            <a:pPr indent="0" marL="0">
+            <a:pPr marL="0" indent="0">
               <a:buNone/>
             </a:pPr>
             <a:r>
@@ -6785,6 +7047,7 @@
         <a:solidFill>
           <a:srgbClr val="0A2342"/>
         </a:solidFill>
+        <a:effectLst/>
       </p:bgPr>
     </p:bg>
     <p:spTree>
@@ -6822,7 +7085,7 @@
           <a:bodyPr wrap="square" lIns="0" tIns="0" rIns="0" bIns="0" rtlCol="0" anchor="ctr"/>
           <a:lstStyle/>
           <a:p>
-            <a:pPr indent="0" marL="0">
+            <a:pPr marL="0" indent="0">
               <a:buNone/>
             </a:pPr>
             <a:r>
@@ -6861,7 +7124,7 @@
           <a:bodyPr wrap="square" lIns="0" tIns="0" rIns="0" bIns="0" rtlCol="0" anchor="ctr"/>
           <a:lstStyle/>
           <a:p>
-            <a:pPr indent="0" marL="0">
+            <a:pPr marL="0" indent="0">
               <a:buNone/>
             </a:pPr>
             <a:r>
@@ -6902,256 +7165,17 @@
             <a:prstDash val="solid"/>
           </a:ln>
         </p:spPr>
+        <p:txBody>
+          <a:bodyPr/>
+          <a:lstStyle/>
+          <a:p>
+            <a:endParaRPr lang="en-US"/>
+          </a:p>
+        </p:txBody>
       </p:sp>
       <p:pic>
         <p:nvPicPr>
-          <p:cNvPr id="5" name="Image 0" descr="preencoded.png">    </p:cNvPr>
-          <p:cNvPicPr>
-            <a:picLocks noChangeAspect="1"/>
-          </p:cNvPicPr>
-          <p:nvPr/>
-        </p:nvPicPr>
-        <p:blipFill>
-          <a:blip r:embed="rId1"/>
-          <a:stretch>
-            <a:fillRect/>
-          </a:stretch>
-        </p:blipFill>
-        <p:spPr>
-          <a:xfrm>
-            <a:off x="502920" y="1527048"/>
-            <a:ext cx="402336" cy="402336"/>
-          </a:xfrm>
-          <a:prstGeom prst="rect">
-            <a:avLst/>
-          </a:prstGeom>
-        </p:spPr>
-      </p:pic>
-      <p:sp>
-        <p:nvSpPr>
-          <p:cNvPr id="6" name="Text 3"/>
-          <p:cNvSpPr/>
-          <p:nvPr/>
-        </p:nvSpPr>
-        <p:spPr>
-          <a:xfrm>
-            <a:off x="1024128" y="1444752"/>
-            <a:ext cx="3246120" cy="256032"/>
-          </a:xfrm>
-          <a:prstGeom prst="rect">
-            <a:avLst/>
-          </a:prstGeom>
-          <a:noFill/>
-          <a:ln/>
-        </p:spPr>
-        <p:txBody>
-          <a:bodyPr wrap="square" lIns="0" tIns="0" rIns="0" bIns="0" rtlCol="0" anchor="ctr"/>
-          <a:lstStyle/>
-          <a:p>
-            <a:pPr indent="0" marL="0">
-              <a:buNone/>
-            </a:pPr>
-            <a:r>
-              <a:rPr lang="en-US" sz="1300" b="1" dirty="0">
-                <a:solidFill>
-                  <a:srgbClr val="5BC8E8"/>
-                </a:solidFill>
-              </a:rPr>
-              <a:t>40% Faster RCA</a:t>
-            </a:r>
-            <a:endParaRPr lang="en-US" sz="1300" dirty="0"/>
-          </a:p>
-        </p:txBody>
-      </p:sp>
-      <p:sp>
-        <p:nvSpPr>
-          <p:cNvPr id="7" name="Text 4"/>
-          <p:cNvSpPr/>
-          <p:nvPr/>
-        </p:nvSpPr>
-        <p:spPr>
-          <a:xfrm>
-            <a:off x="1024128" y="1700784"/>
-            <a:ext cx="3246120" cy="402336"/>
-          </a:xfrm>
-          <a:prstGeom prst="rect">
-            <a:avLst/>
-          </a:prstGeom>
-          <a:noFill/>
-          <a:ln/>
-        </p:spPr>
-        <p:txBody>
-          <a:bodyPr wrap="square" lIns="0" tIns="0" rIns="0" bIns="0" rtlCol="0" anchor="ctr"/>
-          <a:lstStyle/>
-          <a:p>
-            <a:pPr indent="0" marL="0">
-              <a:buNone/>
-            </a:pPr>
-            <a:r>
-              <a:rPr lang="en-US" sz="1100" dirty="0">
-                <a:solidFill>
-                  <a:srgbClr val="E8F4F8"/>
-                </a:solidFill>
-              </a:rPr>
-              <a:t>From hours to minutes. Engineers focus on tuning and recommendations, not log archaeology.</a:t>
-            </a:r>
-            <a:endParaRPr lang="en-US" sz="1100" dirty="0"/>
-          </a:p>
-        </p:txBody>
-      </p:sp>
-      <p:sp>
-        <p:nvSpPr>
-          <p:cNvPr id="8" name="Shape 5"/>
-          <p:cNvSpPr/>
-          <p:nvPr/>
-        </p:nvSpPr>
-        <p:spPr>
-          <a:xfrm>
-            <a:off x="4663440" y="1371600"/>
-            <a:ext cx="4069080" cy="777240"/>
-          </a:xfrm>
-          <a:prstGeom prst="roundRect">
-            <a:avLst>
-              <a:gd name="adj" fmla="val 9412"/>
-            </a:avLst>
-          </a:prstGeom>
-          <a:solidFill>
-            <a:srgbClr val="132D4A"/>
-          </a:solidFill>
-          <a:ln w="12700">
-            <a:solidFill>
-              <a:srgbClr val="132D4A"/>
-            </a:solidFill>
-            <a:prstDash val="solid"/>
-          </a:ln>
-        </p:spPr>
-      </p:sp>
-      <p:pic>
-        <p:nvPicPr>
-          <p:cNvPr id="9" name="Image 1" descr="preencoded.png">    </p:cNvPr>
-          <p:cNvPicPr>
-            <a:picLocks noChangeAspect="1"/>
-          </p:cNvPicPr>
-          <p:nvPr/>
-        </p:nvPicPr>
-        <p:blipFill>
-          <a:blip r:embed="rId2"/>
-          <a:stretch>
-            <a:fillRect/>
-          </a:stretch>
-        </p:blipFill>
-        <p:spPr>
-          <a:xfrm>
-            <a:off x="4800600" y="1527048"/>
-            <a:ext cx="402336" cy="402336"/>
-          </a:xfrm>
-          <a:prstGeom prst="rect">
-            <a:avLst/>
-          </a:prstGeom>
-        </p:spPr>
-      </p:pic>
-      <p:sp>
-        <p:nvSpPr>
-          <p:cNvPr id="10" name="Text 6"/>
-          <p:cNvSpPr/>
-          <p:nvPr/>
-        </p:nvSpPr>
-        <p:spPr>
-          <a:xfrm>
-            <a:off x="5321808" y="1444752"/>
-            <a:ext cx="3246120" cy="256032"/>
-          </a:xfrm>
-          <a:prstGeom prst="rect">
-            <a:avLst/>
-          </a:prstGeom>
-          <a:noFill/>
-          <a:ln/>
-        </p:spPr>
-        <p:txBody>
-          <a:bodyPr wrap="square" lIns="0" tIns="0" rIns="0" bIns="0" rtlCol="0" anchor="ctr"/>
-          <a:lstStyle/>
-          <a:p>
-            <a:pPr indent="0" marL="0">
-              <a:buNone/>
-            </a:pPr>
-            <a:r>
-              <a:rPr lang="en-US" sz="1300" b="1" dirty="0">
-                <a:solidFill>
-                  <a:srgbClr val="5BC8E8"/>
-                </a:solidFill>
-              </a:rPr>
-              <a:t>No Missed Correlations</a:t>
-            </a:r>
-            <a:endParaRPr lang="en-US" sz="1300" dirty="0"/>
-          </a:p>
-        </p:txBody>
-      </p:sp>
-      <p:sp>
-        <p:nvSpPr>
-          <p:cNvPr id="11" name="Text 7"/>
-          <p:cNvSpPr/>
-          <p:nvPr/>
-        </p:nvSpPr>
-        <p:spPr>
-          <a:xfrm>
-            <a:off x="5321808" y="1700784"/>
-            <a:ext cx="3246120" cy="402336"/>
-          </a:xfrm>
-          <a:prstGeom prst="rect">
-            <a:avLst/>
-          </a:prstGeom>
-          <a:noFill/>
-          <a:ln/>
-        </p:spPr>
-        <p:txBody>
-          <a:bodyPr wrap="square" lIns="0" tIns="0" rIns="0" bIns="0" rtlCol="0" anchor="ctr"/>
-          <a:lstStyle/>
-          <a:p>
-            <a:pPr indent="0" marL="0">
-              <a:buNone/>
-            </a:pPr>
-            <a:r>
-              <a:rPr lang="en-US" sz="1100" dirty="0">
-                <a:solidFill>
-                  <a:srgbClr val="E8F4F8"/>
-                </a:solidFill>
-              </a:rPr>
-              <a:t>Cross-source correlation caught the memory leak → SQL deadlock chain that a single-tool view would miss.</a:t>
-            </a:r>
-            <a:endParaRPr lang="en-US" sz="1100" dirty="0"/>
-          </a:p>
-        </p:txBody>
-      </p:sp>
-      <p:sp>
-        <p:nvSpPr>
-          <p:cNvPr id="12" name="Shape 8"/>
-          <p:cNvSpPr/>
-          <p:nvPr/>
-        </p:nvSpPr>
-        <p:spPr>
-          <a:xfrm>
-            <a:off x="365760" y="2286000"/>
-            <a:ext cx="4069080" cy="777240"/>
-          </a:xfrm>
-          <a:prstGeom prst="roundRect">
-            <a:avLst>
-              <a:gd name="adj" fmla="val 9412"/>
-            </a:avLst>
-          </a:prstGeom>
-          <a:solidFill>
-            <a:srgbClr val="132D4A"/>
-          </a:solidFill>
-          <a:ln w="12700">
-            <a:solidFill>
-              <a:srgbClr val="132D4A"/>
-            </a:solidFill>
-            <a:prstDash val="solid"/>
-          </a:ln>
-        </p:spPr>
-      </p:sp>
-      <p:pic>
-        <p:nvPicPr>
-          <p:cNvPr id="13" name="Image 2" descr="preencoded.png">    </p:cNvPr>
+          <p:cNvPr id="5" name="Image 0" descr="preencoded.png"/>
           <p:cNvPicPr>
             <a:picLocks noChangeAspect="1"/>
           </p:cNvPicPr>
@@ -7165,7 +7189,7 @@
         </p:blipFill>
         <p:spPr>
           <a:xfrm>
-            <a:off x="502920" y="2441448"/>
+            <a:off x="502920" y="1527048"/>
             <a:ext cx="402336" cy="402336"/>
           </a:xfrm>
           <a:prstGeom prst="rect">
@@ -7175,13 +7199,13 @@
       </p:pic>
       <p:sp>
         <p:nvSpPr>
-          <p:cNvPr id="14" name="Text 9"/>
-          <p:cNvSpPr/>
-          <p:nvPr/>
-        </p:nvSpPr>
-        <p:spPr>
-          <a:xfrm>
-            <a:off x="1024128" y="2359152"/>
+          <p:cNvPr id="6" name="Text 3"/>
+          <p:cNvSpPr/>
+          <p:nvPr/>
+        </p:nvSpPr>
+        <p:spPr>
+          <a:xfrm>
+            <a:off x="1024128" y="1444752"/>
             <a:ext cx="3246120" cy="256032"/>
           </a:xfrm>
           <a:prstGeom prst="rect">
@@ -7194,7 +7218,7 @@
           <a:bodyPr wrap="square" lIns="0" tIns="0" rIns="0" bIns="0" rtlCol="0" anchor="ctr"/>
           <a:lstStyle/>
           <a:p>
-            <a:pPr indent="0" marL="0">
+            <a:pPr marL="0" indent="0">
               <a:buNone/>
             </a:pPr>
             <a:r>
@@ -7203,7 +7227,7 @@
                   <a:srgbClr val="5BC8E8"/>
                 </a:solidFill>
               </a:rPr>
-              <a:t>Consistent, Audit-Ready Reports</a:t>
+              <a:t>60% Faster RCA</a:t>
             </a:r>
             <a:endParaRPr lang="en-US" sz="1300" dirty="0"/>
           </a:p>
@@ -7211,13 +7235,13 @@
       </p:sp>
       <p:sp>
         <p:nvSpPr>
-          <p:cNvPr id="15" name="Text 10"/>
-          <p:cNvSpPr/>
-          <p:nvPr/>
-        </p:nvSpPr>
-        <p:spPr>
-          <a:xfrm>
-            <a:off x="1024128" y="2615184"/>
+          <p:cNvPr id="7" name="Text 4"/>
+          <p:cNvSpPr/>
+          <p:nvPr/>
+        </p:nvSpPr>
+        <p:spPr>
+          <a:xfrm>
+            <a:off x="1024128" y="1700784"/>
             <a:ext cx="3246120" cy="402336"/>
           </a:xfrm>
           <a:prstGeom prst="rect">
@@ -7230,7 +7254,7 @@
           <a:bodyPr wrap="square" lIns="0" tIns="0" rIns="0" bIns="0" rtlCol="0" anchor="ctr"/>
           <a:lstStyle/>
           <a:p>
-            <a:pPr indent="0" marL="0">
+            <a:pPr marL="0" indent="0">
               <a:buNone/>
             </a:pPr>
             <a:r>
@@ -7239,7 +7263,7 @@
                   <a:srgbClr val="E8F4F8"/>
                 </a:solidFill>
               </a:rPr>
-              <a:t>Every run produces an identical HTML + PDF — branded, client-ready, version-controlled.</a:t>
+              <a:t>From hours to minutes. Engineers focus on tuning and recommendations, not log archaeology.</a:t>
             </a:r>
             <a:endParaRPr lang="en-US" sz="1100" dirty="0"/>
           </a:p>
@@ -7247,13 +7271,13 @@
       </p:sp>
       <p:sp>
         <p:nvSpPr>
-          <p:cNvPr id="16" name="Shape 11"/>
-          <p:cNvSpPr/>
-          <p:nvPr/>
-        </p:nvSpPr>
-        <p:spPr>
-          <a:xfrm>
-            <a:off x="4663440" y="2286000"/>
+          <p:cNvPr id="8" name="Shape 5"/>
+          <p:cNvSpPr/>
+          <p:nvPr/>
+        </p:nvSpPr>
+        <p:spPr>
+          <a:xfrm>
+            <a:off x="4663440" y="1371600"/>
             <a:ext cx="4069080" cy="777240"/>
           </a:xfrm>
           <a:prstGeom prst="roundRect">
@@ -7271,10 +7295,17 @@
             <a:prstDash val="solid"/>
           </a:ln>
         </p:spPr>
+        <p:txBody>
+          <a:bodyPr/>
+          <a:lstStyle/>
+          <a:p>
+            <a:endParaRPr lang="en-US"/>
+          </a:p>
+        </p:txBody>
       </p:sp>
       <p:pic>
         <p:nvPicPr>
-          <p:cNvPr id="17" name="Image 3" descr="preencoded.png">    </p:cNvPr>
+          <p:cNvPr id="9" name="Image 1" descr="preencoded.png"/>
           <p:cNvPicPr>
             <a:picLocks noChangeAspect="1"/>
           </p:cNvPicPr>
@@ -7288,7 +7319,7 @@
         </p:blipFill>
         <p:spPr>
           <a:xfrm>
-            <a:off x="4800600" y="2441448"/>
+            <a:off x="4800600" y="1527048"/>
             <a:ext cx="402336" cy="402336"/>
           </a:xfrm>
           <a:prstGeom prst="rect">
@@ -7298,13 +7329,13 @@
       </p:pic>
       <p:sp>
         <p:nvSpPr>
-          <p:cNvPr id="18" name="Text 12"/>
-          <p:cNvSpPr/>
-          <p:nvPr/>
-        </p:nvSpPr>
-        <p:spPr>
-          <a:xfrm>
-            <a:off x="5321808" y="2359152"/>
+          <p:cNvPr id="10" name="Text 6"/>
+          <p:cNvSpPr/>
+          <p:nvPr/>
+        </p:nvSpPr>
+        <p:spPr>
+          <a:xfrm>
+            <a:off x="5321808" y="1444752"/>
             <a:ext cx="3246120" cy="256032"/>
           </a:xfrm>
           <a:prstGeom prst="rect">
@@ -7317,7 +7348,7 @@
           <a:bodyPr wrap="square" lIns="0" tIns="0" rIns="0" bIns="0" rtlCol="0" anchor="ctr"/>
           <a:lstStyle/>
           <a:p>
-            <a:pPr indent="0" marL="0">
+            <a:pPr marL="0" indent="0">
               <a:buNone/>
             </a:pPr>
             <a:r>
@@ -7326,7 +7357,7 @@
                   <a:srgbClr val="5BC8E8"/>
                 </a:solidFill>
               </a:rPr>
-              <a:t>Scales Across Runs</a:t>
+              <a:t>No Missed Correlations</a:t>
             </a:r>
             <a:endParaRPr lang="en-US" sz="1300" dirty="0"/>
           </a:p>
@@ -7334,13 +7365,13 @@
       </p:sp>
       <p:sp>
         <p:nvSpPr>
-          <p:cNvPr id="19" name="Text 13"/>
-          <p:cNvSpPr/>
-          <p:nvPr/>
-        </p:nvSpPr>
-        <p:spPr>
-          <a:xfrm>
-            <a:off x="5321808" y="2615184"/>
+          <p:cNvPr id="11" name="Text 7"/>
+          <p:cNvSpPr/>
+          <p:nvPr/>
+        </p:nvSpPr>
+        <p:spPr>
+          <a:xfrm>
+            <a:off x="5321808" y="1700784"/>
             <a:ext cx="3246120" cy="402336"/>
           </a:xfrm>
           <a:prstGeom prst="rect">
@@ -7353,7 +7384,7 @@
           <a:bodyPr wrap="square" lIns="0" tIns="0" rIns="0" bIns="0" rtlCol="0" anchor="ctr"/>
           <a:lstStyle/>
           <a:p>
-            <a:pPr indent="0" marL="0">
+            <a:pPr marL="0" indent="0">
               <a:buNone/>
             </a:pPr>
             <a:r>
@@ -7362,7 +7393,7 @@
                   <a:srgbClr val="E8F4F8"/>
                 </a:solidFill>
               </a:rPr>
-              <a:t>Watch-mode auto-processes logs as they arrive. No babysitting the test lab.</a:t>
+              <a:t>Cross-source correlation caught the memory leak → SQL deadlock chain that a single-tool view would miss.</a:t>
             </a:r>
             <a:endParaRPr lang="en-US" sz="1100" dirty="0"/>
           </a:p>
@@ -7370,13 +7401,13 @@
       </p:sp>
       <p:sp>
         <p:nvSpPr>
-          <p:cNvPr id="20" name="Shape 14"/>
-          <p:cNvSpPr/>
-          <p:nvPr/>
-        </p:nvSpPr>
-        <p:spPr>
-          <a:xfrm>
-            <a:off x="365760" y="3200400"/>
+          <p:cNvPr id="12" name="Shape 8"/>
+          <p:cNvSpPr/>
+          <p:nvPr/>
+        </p:nvSpPr>
+        <p:spPr>
+          <a:xfrm>
+            <a:off x="365760" y="2286000"/>
             <a:ext cx="4069080" cy="777240"/>
           </a:xfrm>
           <a:prstGeom prst="roundRect">
@@ -7394,10 +7425,17 @@
             <a:prstDash val="solid"/>
           </a:ln>
         </p:spPr>
+        <p:txBody>
+          <a:bodyPr/>
+          <a:lstStyle/>
+          <a:p>
+            <a:endParaRPr lang="en-US"/>
+          </a:p>
+        </p:txBody>
       </p:sp>
       <p:pic>
         <p:nvPicPr>
-          <p:cNvPr id="21" name="Image 4" descr="preencoded.png">    </p:cNvPr>
+          <p:cNvPr id="13" name="Image 2" descr="preencoded.png"/>
           <p:cNvPicPr>
             <a:picLocks noChangeAspect="1"/>
           </p:cNvPicPr>
@@ -7411,7 +7449,7 @@
         </p:blipFill>
         <p:spPr>
           <a:xfrm>
-            <a:off x="502920" y="3355848"/>
+            <a:off x="502920" y="2441448"/>
             <a:ext cx="402336" cy="402336"/>
           </a:xfrm>
           <a:prstGeom prst="rect">
@@ -7421,13 +7459,13 @@
       </p:pic>
       <p:sp>
         <p:nvSpPr>
-          <p:cNvPr id="22" name="Text 15"/>
-          <p:cNvSpPr/>
-          <p:nvPr/>
-        </p:nvSpPr>
-        <p:spPr>
-          <a:xfrm>
-            <a:off x="1024128" y="3273552"/>
+          <p:cNvPr id="14" name="Text 9"/>
+          <p:cNvSpPr/>
+          <p:nvPr/>
+        </p:nvSpPr>
+        <p:spPr>
+          <a:xfrm>
+            <a:off x="1024128" y="2359152"/>
             <a:ext cx="3246120" cy="256032"/>
           </a:xfrm>
           <a:prstGeom prst="rect">
@@ -7440,7 +7478,7 @@
           <a:bodyPr wrap="square" lIns="0" tIns="0" rIns="0" bIns="0" rtlCol="0" anchor="ctr"/>
           <a:lstStyle/>
           <a:p>
-            <a:pPr indent="0" marL="0">
+            <a:pPr marL="0" indent="0">
               <a:buNone/>
             </a:pPr>
             <a:r>
@@ -7449,7 +7487,7 @@
                   <a:srgbClr val="5BC8E8"/>
                 </a:solidFill>
               </a:rPr>
-              <a:t>Explainable AI</a:t>
+              <a:t>Consistent, Audit-Ready Reports</a:t>
             </a:r>
             <a:endParaRPr lang="en-US" sz="1300" dirty="0"/>
           </a:p>
@@ -7457,13 +7495,13 @@
       </p:sp>
       <p:sp>
         <p:nvSpPr>
-          <p:cNvPr id="23" name="Text 16"/>
-          <p:cNvSpPr/>
-          <p:nvPr/>
-        </p:nvSpPr>
-        <p:spPr>
-          <a:xfrm>
-            <a:off x="1024128" y="3529584"/>
+          <p:cNvPr id="15" name="Text 10"/>
+          <p:cNvSpPr/>
+          <p:nvPr/>
+        </p:nvSpPr>
+        <p:spPr>
+          <a:xfrm>
+            <a:off x="1024128" y="2615184"/>
             <a:ext cx="3246120" cy="402336"/>
           </a:xfrm>
           <a:prstGeom prst="rect">
@@ -7476,7 +7514,7 @@
           <a:bodyPr wrap="square" lIns="0" tIns="0" rIns="0" bIns="0" rtlCol="0" anchor="ctr"/>
           <a:lstStyle/>
           <a:p>
-            <a:pPr indent="0" marL="0">
+            <a:pPr marL="0" indent="0">
               <a:buNone/>
             </a:pPr>
             <a:r>
@@ -7485,7 +7523,7 @@
                   <a:srgbClr val="E8F4F8"/>
                 </a:solidFill>
               </a:rPr>
-              <a:t>Every finding links to raw log evidence with exact timestamps. Full traceability, no black box.</a:t>
+              <a:t>Every run produces an identical HTML + PDF — branded, client-ready, version-controlled.</a:t>
             </a:r>
             <a:endParaRPr lang="en-US" sz="1100" dirty="0"/>
           </a:p>
@@ -7493,13 +7531,13 @@
       </p:sp>
       <p:sp>
         <p:nvSpPr>
-          <p:cNvPr id="24" name="Shape 17"/>
-          <p:cNvSpPr/>
-          <p:nvPr/>
-        </p:nvSpPr>
-        <p:spPr>
-          <a:xfrm>
-            <a:off x="4663440" y="3200400"/>
+          <p:cNvPr id="16" name="Shape 11"/>
+          <p:cNvSpPr/>
+          <p:nvPr/>
+        </p:nvSpPr>
+        <p:spPr>
+          <a:xfrm>
+            <a:off x="4663440" y="2286000"/>
             <a:ext cx="4069080" cy="777240"/>
           </a:xfrm>
           <a:prstGeom prst="roundRect">
@@ -7517,10 +7555,17 @@
             <a:prstDash val="solid"/>
           </a:ln>
         </p:spPr>
+        <p:txBody>
+          <a:bodyPr/>
+          <a:lstStyle/>
+          <a:p>
+            <a:endParaRPr lang="en-US"/>
+          </a:p>
+        </p:txBody>
       </p:sp>
       <p:pic>
         <p:nvPicPr>
-          <p:cNvPr id="25" name="Image 5" descr="preencoded.png">    </p:cNvPr>
+          <p:cNvPr id="17" name="Image 3" descr="preencoded.png"/>
           <p:cNvPicPr>
             <a:picLocks noChangeAspect="1"/>
           </p:cNvPicPr>
@@ -7534,6 +7579,266 @@
         </p:blipFill>
         <p:spPr>
           <a:xfrm>
+            <a:off x="4800600" y="2441448"/>
+            <a:ext cx="402336" cy="402336"/>
+          </a:xfrm>
+          <a:prstGeom prst="rect">
+            <a:avLst/>
+          </a:prstGeom>
+        </p:spPr>
+      </p:pic>
+      <p:sp>
+        <p:nvSpPr>
+          <p:cNvPr id="18" name="Text 12"/>
+          <p:cNvSpPr/>
+          <p:nvPr/>
+        </p:nvSpPr>
+        <p:spPr>
+          <a:xfrm>
+            <a:off x="5321808" y="2359152"/>
+            <a:ext cx="3246120" cy="256032"/>
+          </a:xfrm>
+          <a:prstGeom prst="rect">
+            <a:avLst/>
+          </a:prstGeom>
+          <a:noFill/>
+          <a:ln/>
+        </p:spPr>
+        <p:txBody>
+          <a:bodyPr wrap="square" lIns="0" tIns="0" rIns="0" bIns="0" rtlCol="0" anchor="ctr"/>
+          <a:lstStyle/>
+          <a:p>
+            <a:pPr marL="0" indent="0">
+              <a:buNone/>
+            </a:pPr>
+            <a:r>
+              <a:rPr lang="en-US" sz="1300" b="1" dirty="0">
+                <a:solidFill>
+                  <a:srgbClr val="5BC8E8"/>
+                </a:solidFill>
+              </a:rPr>
+              <a:t>Scales Across Runs</a:t>
+            </a:r>
+            <a:endParaRPr lang="en-US" sz="1300" dirty="0"/>
+          </a:p>
+        </p:txBody>
+      </p:sp>
+      <p:sp>
+        <p:nvSpPr>
+          <p:cNvPr id="19" name="Text 13"/>
+          <p:cNvSpPr/>
+          <p:nvPr/>
+        </p:nvSpPr>
+        <p:spPr>
+          <a:xfrm>
+            <a:off x="5321808" y="2615184"/>
+            <a:ext cx="3246120" cy="402336"/>
+          </a:xfrm>
+          <a:prstGeom prst="rect">
+            <a:avLst/>
+          </a:prstGeom>
+          <a:noFill/>
+          <a:ln/>
+        </p:spPr>
+        <p:txBody>
+          <a:bodyPr wrap="square" lIns="0" tIns="0" rIns="0" bIns="0" rtlCol="0" anchor="ctr"/>
+          <a:lstStyle/>
+          <a:p>
+            <a:pPr marL="0" indent="0">
+              <a:buNone/>
+            </a:pPr>
+            <a:r>
+              <a:rPr lang="en-US" sz="1100" dirty="0">
+                <a:solidFill>
+                  <a:srgbClr val="E8F4F8"/>
+                </a:solidFill>
+              </a:rPr>
+              <a:t>Watch-mode auto-processes logs as they arrive. No babysitting the test lab.</a:t>
+            </a:r>
+            <a:endParaRPr lang="en-US" sz="1100" dirty="0"/>
+          </a:p>
+        </p:txBody>
+      </p:sp>
+      <p:sp>
+        <p:nvSpPr>
+          <p:cNvPr id="20" name="Shape 14"/>
+          <p:cNvSpPr/>
+          <p:nvPr/>
+        </p:nvSpPr>
+        <p:spPr>
+          <a:xfrm>
+            <a:off x="365760" y="3200400"/>
+            <a:ext cx="4069080" cy="777240"/>
+          </a:xfrm>
+          <a:prstGeom prst="roundRect">
+            <a:avLst>
+              <a:gd name="adj" fmla="val 9412"/>
+            </a:avLst>
+          </a:prstGeom>
+          <a:solidFill>
+            <a:srgbClr val="132D4A"/>
+          </a:solidFill>
+          <a:ln w="12700">
+            <a:solidFill>
+              <a:srgbClr val="132D4A"/>
+            </a:solidFill>
+            <a:prstDash val="solid"/>
+          </a:ln>
+        </p:spPr>
+        <p:txBody>
+          <a:bodyPr/>
+          <a:lstStyle/>
+          <a:p>
+            <a:endParaRPr lang="en-US"/>
+          </a:p>
+        </p:txBody>
+      </p:sp>
+      <p:pic>
+        <p:nvPicPr>
+          <p:cNvPr id="21" name="Image 4" descr="preencoded.png"/>
+          <p:cNvPicPr>
+            <a:picLocks noChangeAspect="1"/>
+          </p:cNvPicPr>
+          <p:nvPr/>
+        </p:nvPicPr>
+        <p:blipFill>
+          <a:blip r:embed="rId7"/>
+          <a:stretch>
+            <a:fillRect/>
+          </a:stretch>
+        </p:blipFill>
+        <p:spPr>
+          <a:xfrm>
+            <a:off x="502920" y="3355848"/>
+            <a:ext cx="402336" cy="402336"/>
+          </a:xfrm>
+          <a:prstGeom prst="rect">
+            <a:avLst/>
+          </a:prstGeom>
+        </p:spPr>
+      </p:pic>
+      <p:sp>
+        <p:nvSpPr>
+          <p:cNvPr id="22" name="Text 15"/>
+          <p:cNvSpPr/>
+          <p:nvPr/>
+        </p:nvSpPr>
+        <p:spPr>
+          <a:xfrm>
+            <a:off x="1024128" y="3273552"/>
+            <a:ext cx="3246120" cy="256032"/>
+          </a:xfrm>
+          <a:prstGeom prst="rect">
+            <a:avLst/>
+          </a:prstGeom>
+          <a:noFill/>
+          <a:ln/>
+        </p:spPr>
+        <p:txBody>
+          <a:bodyPr wrap="square" lIns="0" tIns="0" rIns="0" bIns="0" rtlCol="0" anchor="ctr"/>
+          <a:lstStyle/>
+          <a:p>
+            <a:pPr marL="0" indent="0">
+              <a:buNone/>
+            </a:pPr>
+            <a:r>
+              <a:rPr lang="en-US" sz="1300" b="1" dirty="0">
+                <a:solidFill>
+                  <a:srgbClr val="5BC8E8"/>
+                </a:solidFill>
+              </a:rPr>
+              <a:t>Explainable AI</a:t>
+            </a:r>
+            <a:endParaRPr lang="en-US" sz="1300" dirty="0"/>
+          </a:p>
+        </p:txBody>
+      </p:sp>
+      <p:sp>
+        <p:nvSpPr>
+          <p:cNvPr id="23" name="Text 16"/>
+          <p:cNvSpPr/>
+          <p:nvPr/>
+        </p:nvSpPr>
+        <p:spPr>
+          <a:xfrm>
+            <a:off x="1024128" y="3529584"/>
+            <a:ext cx="3246120" cy="402336"/>
+          </a:xfrm>
+          <a:prstGeom prst="rect">
+            <a:avLst/>
+          </a:prstGeom>
+          <a:noFill/>
+          <a:ln/>
+        </p:spPr>
+        <p:txBody>
+          <a:bodyPr wrap="square" lIns="0" tIns="0" rIns="0" bIns="0" rtlCol="0" anchor="ctr"/>
+          <a:lstStyle/>
+          <a:p>
+            <a:pPr marL="0" indent="0">
+              <a:buNone/>
+            </a:pPr>
+            <a:r>
+              <a:rPr lang="en-US" sz="1100" dirty="0">
+                <a:solidFill>
+                  <a:srgbClr val="E8F4F8"/>
+                </a:solidFill>
+              </a:rPr>
+              <a:t>Every finding links to raw log evidence with exact timestamps. Full traceability, no black box.</a:t>
+            </a:r>
+            <a:endParaRPr lang="en-US" sz="1100" dirty="0"/>
+          </a:p>
+        </p:txBody>
+      </p:sp>
+      <p:sp>
+        <p:nvSpPr>
+          <p:cNvPr id="24" name="Shape 17"/>
+          <p:cNvSpPr/>
+          <p:nvPr/>
+        </p:nvSpPr>
+        <p:spPr>
+          <a:xfrm>
+            <a:off x="4663440" y="3200400"/>
+            <a:ext cx="4069080" cy="777240"/>
+          </a:xfrm>
+          <a:prstGeom prst="roundRect">
+            <a:avLst>
+              <a:gd name="adj" fmla="val 9412"/>
+            </a:avLst>
+          </a:prstGeom>
+          <a:solidFill>
+            <a:srgbClr val="132D4A"/>
+          </a:solidFill>
+          <a:ln w="12700">
+            <a:solidFill>
+              <a:srgbClr val="132D4A"/>
+            </a:solidFill>
+            <a:prstDash val="solid"/>
+          </a:ln>
+        </p:spPr>
+        <p:txBody>
+          <a:bodyPr/>
+          <a:lstStyle/>
+          <a:p>
+            <a:endParaRPr lang="en-US"/>
+          </a:p>
+        </p:txBody>
+      </p:sp>
+      <p:pic>
+        <p:nvPicPr>
+          <p:cNvPr id="25" name="Image 5" descr="preencoded.png"/>
+          <p:cNvPicPr>
+            <a:picLocks noChangeAspect="1"/>
+          </p:cNvPicPr>
+          <p:nvPr/>
+        </p:nvPicPr>
+        <p:blipFill>
+          <a:blip r:embed="rId8"/>
+          <a:stretch>
+            <a:fillRect/>
+          </a:stretch>
+        </p:blipFill>
+        <p:spPr>
+          <a:xfrm>
             <a:off x="4800600" y="3355848"/>
             <a:ext cx="402336" cy="402336"/>
           </a:xfrm>
@@ -7563,7 +7868,7 @@
           <a:bodyPr wrap="square" lIns="0" tIns="0" rIns="0" bIns="0" rtlCol="0" anchor="ctr"/>
           <a:lstStyle/>
           <a:p>
-            <a:pPr indent="0" marL="0">
+            <a:pPr marL="0" indent="0">
               <a:buNone/>
             </a:pPr>
             <a:r>
@@ -7599,7 +7904,7 @@
           <a:bodyPr wrap="square" lIns="0" tIns="0" rIns="0" bIns="0" rtlCol="0" anchor="ctr"/>
           <a:lstStyle/>
           <a:p>
-            <a:pPr indent="0" marL="0">
+            <a:pPr marL="0" indent="0">
               <a:buNone/>
             </a:pPr>
             <a:r>
@@ -7630,6 +7935,7 @@
         <a:solidFill>
           <a:srgbClr val="0A2342"/>
         </a:solidFill>
+        <a:effectLst/>
       </p:bgPr>
     </p:bg>
     <p:spTree>
@@ -7672,6 +7978,13 @@
             <a:prstDash val="solid"/>
           </a:ln>
         </p:spPr>
+        <p:txBody>
+          <a:bodyPr/>
+          <a:lstStyle/>
+          <a:p>
+            <a:endParaRPr lang="en-US"/>
+          </a:p>
+        </p:txBody>
       </p:sp>
       <p:sp>
         <p:nvSpPr>
@@ -7694,7 +8007,7 @@
           <a:bodyPr wrap="square" lIns="0" tIns="0" rIns="0" bIns="0" rtlCol="0" anchor="ctr"/>
           <a:lstStyle/>
           <a:p>
-            <a:pPr indent="0" marL="0">
+            <a:pPr marL="0" indent="0">
               <a:buNone/>
             </a:pPr>
             <a:r>
@@ -7733,7 +8046,7 @@
           <a:bodyPr wrap="square" lIns="0" tIns="0" rIns="0" bIns="0" rtlCol="0" anchor="ctr"/>
           <a:lstStyle/>
           <a:p>
-            <a:pPr indent="0" marL="0">
+            <a:pPr marL="0" indent="0">
               <a:buNone/>
             </a:pPr>
             <a:r>
@@ -7772,6 +8085,13 @@
             <a:prstDash val="solid"/>
           </a:ln>
         </p:spPr>
+        <p:txBody>
+          <a:bodyPr/>
+          <a:lstStyle/>
+          <a:p>
+            <a:endParaRPr lang="en-US"/>
+          </a:p>
+        </p:txBody>
       </p:sp>
       <p:sp>
         <p:nvSpPr>
@@ -7794,7 +8114,7 @@
           <a:bodyPr wrap="square" lIns="0" tIns="0" rIns="0" bIns="0" rtlCol="0" anchor="ctr"/>
           <a:lstStyle/>
           <a:p>
-            <a:pPr algn="ctr" indent="0" marL="0">
+            <a:pPr marL="0" indent="0" algn="ctr">
               <a:buNone/>
             </a:pPr>
             <a:r>
@@ -7831,6 +8151,13 @@
             <a:prstDash val="dash"/>
           </a:ln>
         </p:spPr>
+        <p:txBody>
+          <a:bodyPr/>
+          <a:lstStyle/>
+          <a:p>
+            <a:endParaRPr lang="en-US"/>
+          </a:p>
+        </p:txBody>
       </p:sp>
       <p:sp>
         <p:nvSpPr>
@@ -7858,6 +8185,13 @@
             <a:prstDash val="solid"/>
           </a:ln>
         </p:spPr>
+        <p:txBody>
+          <a:bodyPr/>
+          <a:lstStyle/>
+          <a:p>
+            <a:endParaRPr lang="en-US"/>
+          </a:p>
+        </p:txBody>
       </p:sp>
       <p:sp>
         <p:nvSpPr>
@@ -7880,7 +8214,7 @@
           <a:bodyPr wrap="square" lIns="0" tIns="0" rIns="0" bIns="0" rtlCol="0" anchor="ctr"/>
           <a:lstStyle/>
           <a:p>
-            <a:pPr indent="0" marL="0">
+            <a:pPr marL="0" indent="0">
               <a:buNone/>
             </a:pPr>
             <a:r>
@@ -7916,7 +8250,7 @@
           <a:bodyPr wrap="square" lIns="0" tIns="0" rIns="0" bIns="0" rtlCol="0" anchor="ctr"/>
           <a:lstStyle/>
           <a:p>
-            <a:pPr indent="0" marL="0">
+            <a:pPr marL="0" indent="0">
               <a:buNone/>
             </a:pPr>
             <a:r>
@@ -7955,6 +8289,13 @@
             <a:prstDash val="solid"/>
           </a:ln>
         </p:spPr>
+        <p:txBody>
+          <a:bodyPr/>
+          <a:lstStyle/>
+          <a:p>
+            <a:endParaRPr lang="en-US"/>
+          </a:p>
+        </p:txBody>
       </p:sp>
       <p:sp>
         <p:nvSpPr>
@@ -7977,7 +8318,7 @@
           <a:bodyPr wrap="square" lIns="0" tIns="0" rIns="0" bIns="0" rtlCol="0" anchor="ctr"/>
           <a:lstStyle/>
           <a:p>
-            <a:pPr algn="ctr" indent="0" marL="0">
+            <a:pPr marL="0" indent="0" algn="ctr">
               <a:buNone/>
             </a:pPr>
             <a:r>
@@ -8014,6 +8355,13 @@
             <a:prstDash val="dash"/>
           </a:ln>
         </p:spPr>
+        <p:txBody>
+          <a:bodyPr/>
+          <a:lstStyle/>
+          <a:p>
+            <a:endParaRPr lang="en-US"/>
+          </a:p>
+        </p:txBody>
       </p:sp>
       <p:sp>
         <p:nvSpPr>
@@ -8041,6 +8389,13 @@
             <a:prstDash val="solid"/>
           </a:ln>
         </p:spPr>
+        <p:txBody>
+          <a:bodyPr/>
+          <a:lstStyle/>
+          <a:p>
+            <a:endParaRPr lang="en-US"/>
+          </a:p>
+        </p:txBody>
       </p:sp>
       <p:sp>
         <p:nvSpPr>
@@ -8063,7 +8418,7 @@
           <a:bodyPr wrap="square" lIns="0" tIns="0" rIns="0" bIns="0" rtlCol="0" anchor="ctr"/>
           <a:lstStyle/>
           <a:p>
-            <a:pPr indent="0" marL="0">
+            <a:pPr marL="0" indent="0">
               <a:buNone/>
             </a:pPr>
             <a:r>
@@ -8099,7 +8454,7 @@
           <a:bodyPr wrap="square" lIns="0" tIns="0" rIns="0" bIns="0" rtlCol="0" anchor="ctr"/>
           <a:lstStyle/>
           <a:p>
-            <a:pPr indent="0" marL="0">
+            <a:pPr marL="0" indent="0">
               <a:buNone/>
             </a:pPr>
             <a:r>
@@ -8138,6 +8493,13 @@
             <a:prstDash val="solid"/>
           </a:ln>
         </p:spPr>
+        <p:txBody>
+          <a:bodyPr/>
+          <a:lstStyle/>
+          <a:p>
+            <a:endParaRPr lang="en-US"/>
+          </a:p>
+        </p:txBody>
       </p:sp>
       <p:sp>
         <p:nvSpPr>
@@ -8160,7 +8522,7 @@
           <a:bodyPr wrap="square" lIns="0" tIns="0" rIns="0" bIns="0" rtlCol="0" anchor="ctr"/>
           <a:lstStyle/>
           <a:p>
-            <a:pPr algn="ctr" indent="0" marL="0">
+            <a:pPr marL="0" indent="0" algn="ctr">
               <a:buNone/>
             </a:pPr>
             <a:r>
@@ -8201,6 +8563,13 @@
             <a:prstDash val="solid"/>
           </a:ln>
         </p:spPr>
+        <p:txBody>
+          <a:bodyPr/>
+          <a:lstStyle/>
+          <a:p>
+            <a:endParaRPr lang="en-US"/>
+          </a:p>
+        </p:txBody>
       </p:sp>
       <p:sp>
         <p:nvSpPr>
@@ -8223,7 +8592,7 @@
           <a:bodyPr wrap="square" lIns="0" tIns="0" rIns="0" bIns="0" rtlCol="0" anchor="ctr"/>
           <a:lstStyle/>
           <a:p>
-            <a:pPr indent="0" marL="0">
+            <a:pPr marL="0" indent="0">
               <a:buNone/>
             </a:pPr>
             <a:r>
@@ -8259,7 +8628,7 @@
           <a:bodyPr wrap="square" lIns="0" tIns="0" rIns="0" bIns="0" rtlCol="0" anchor="ctr"/>
           <a:lstStyle/>
           <a:p>
-            <a:pPr indent="0" marL="0">
+            <a:pPr marL="0" indent="0">
               <a:buNone/>
             </a:pPr>
             <a:r>
@@ -8295,7 +8664,7 @@
           <a:bodyPr wrap="square" lIns="0" tIns="0" rIns="0" bIns="0" rtlCol="0" anchor="ctr"/>
           <a:lstStyle/>
           <a:p>
-            <a:pPr indent="0" marL="0">
+            <a:pPr marL="0" indent="0">
               <a:buNone/>
             </a:pPr>
             <a:r>
@@ -8611,4 +8980,319 @@
     </a:ext>
   </a:extLst>
 </a:theme>
+</file>
+
+<file path=ppt/theme/theme2.xml><?xml version="1.0" encoding="utf-8"?>
+<a:theme xmlns:a="http://schemas.openxmlformats.org/drawingml/2006/main" name="Office Theme">
+  <a:themeElements>
+    <a:clrScheme name="Office">
+      <a:dk1>
+        <a:sysClr val="windowText" lastClr="000000"/>
+      </a:dk1>
+      <a:lt1>
+        <a:sysClr val="window" lastClr="FFFFFF"/>
+      </a:lt1>
+      <a:dk2>
+        <a:srgbClr val="0E2841"/>
+      </a:dk2>
+      <a:lt2>
+        <a:srgbClr val="E8E8E8"/>
+      </a:lt2>
+      <a:accent1>
+        <a:srgbClr val="156082"/>
+      </a:accent1>
+      <a:accent2>
+        <a:srgbClr val="E97132"/>
+      </a:accent2>
+      <a:accent3>
+        <a:srgbClr val="196B24"/>
+      </a:accent3>
+      <a:accent4>
+        <a:srgbClr val="0F9ED5"/>
+      </a:accent4>
+      <a:accent5>
+        <a:srgbClr val="A02B93"/>
+      </a:accent5>
+      <a:accent6>
+        <a:srgbClr val="4EA72E"/>
+      </a:accent6>
+      <a:hlink>
+        <a:srgbClr val="467886"/>
+      </a:hlink>
+      <a:folHlink>
+        <a:srgbClr val="96607D"/>
+      </a:folHlink>
+    </a:clrScheme>
+    <a:fontScheme name="Office">
+      <a:majorFont>
+        <a:latin typeface="Aptos Display" panose="02110004020202020204"/>
+        <a:ea typeface=""/>
+        <a:cs typeface=""/>
+        <a:font script="Jpan" typeface="游ゴシック Light"/>
+        <a:font script="Hang" typeface="맑은 고딕"/>
+        <a:font script="Hans" typeface="等线 Light"/>
+        <a:font script="Hant" typeface="新細明體"/>
+        <a:font script="Arab" typeface="Times New Roman"/>
+        <a:font script="Hebr" typeface="Times New Roman"/>
+        <a:font script="Thai" typeface="Angsana New"/>
+        <a:font script="Ethi" typeface="Nyala"/>
+        <a:font script="Beng" typeface="Vrinda"/>
+        <a:font script="Gujr" typeface="Shruti"/>
+        <a:font script="Khmr" typeface="MoolBoran"/>
+        <a:font script="Knda" typeface="Tunga"/>
+        <a:font script="Guru" typeface="Raavi"/>
+        <a:font script="Cans" typeface="Euphemia"/>
+        <a:font script="Cher" typeface="Plantagenet Cherokee"/>
+        <a:font script="Yiii" typeface="Microsoft Yi Baiti"/>
+        <a:font script="Tibt" typeface="Microsoft Himalaya"/>
+        <a:font script="Thaa" typeface="MV Boli"/>
+        <a:font script="Deva" typeface="Mangal"/>
+        <a:font script="Telu" typeface="Gautami"/>
+        <a:font script="Taml" typeface="Latha"/>
+        <a:font script="Syrc" typeface="Estrangelo Edessa"/>
+        <a:font script="Orya" typeface="Kalinga"/>
+        <a:font script="Mlym" typeface="Kartika"/>
+        <a:font script="Laoo" typeface="DokChampa"/>
+        <a:font script="Sinh" typeface="Iskoola Pota"/>
+        <a:font script="Mong" typeface="Mongolian Baiti"/>
+        <a:font script="Viet" typeface="Times New Roman"/>
+        <a:font script="Uigh" typeface="Microsoft Uighur"/>
+        <a:font script="Geor" typeface="Sylfaen"/>
+        <a:font script="Armn" typeface="Arial"/>
+        <a:font script="Bugi" typeface="Leelawadee UI"/>
+        <a:font script="Bopo" typeface="Microsoft JhengHei"/>
+        <a:font script="Java" typeface="Javanese Text"/>
+        <a:font script="Lisu" typeface="Segoe UI"/>
+        <a:font script="Mymr" typeface="Myanmar Text"/>
+        <a:font script="Nkoo" typeface="Ebrima"/>
+        <a:font script="Olck" typeface="Nirmala UI"/>
+        <a:font script="Osma" typeface="Ebrima"/>
+        <a:font script="Phag" typeface="Phagspa"/>
+        <a:font script="Syrn" typeface="Estrangelo Edessa"/>
+        <a:font script="Syrj" typeface="Estrangelo Edessa"/>
+        <a:font script="Syre" typeface="Estrangelo Edessa"/>
+        <a:font script="Sora" typeface="Nirmala UI"/>
+        <a:font script="Tale" typeface="Microsoft Tai Le"/>
+        <a:font script="Talu" typeface="Microsoft New Tai Lue"/>
+        <a:font script="Tfng" typeface="Ebrima"/>
+      </a:majorFont>
+      <a:minorFont>
+        <a:latin typeface="Aptos" panose="02110004020202020204"/>
+        <a:ea typeface=""/>
+        <a:cs typeface=""/>
+        <a:font script="Jpan" typeface="游ゴシック"/>
+        <a:font script="Hang" typeface="맑은 고딕"/>
+        <a:font script="Hans" typeface="等线"/>
+        <a:font script="Hant" typeface="新細明體"/>
+        <a:font script="Arab" typeface="Arial"/>
+        <a:font script="Hebr" typeface="Arial"/>
+        <a:font script="Thai" typeface="Cordia New"/>
+        <a:font script="Ethi" typeface="Nyala"/>
+        <a:font script="Beng" typeface="Vrinda"/>
+        <a:font script="Gujr" typeface="Shruti"/>
+        <a:font script="Khmr" typeface="DaunPenh"/>
+        <a:font script="Knda" typeface="Tunga"/>
+        <a:font script="Guru" typeface="Raavi"/>
+        <a:font script="Cans" typeface="Euphemia"/>
+        <a:font script="Cher" typeface="Plantagenet Cherokee"/>
+        <a:font script="Yiii" typeface="Microsoft Yi Baiti"/>
+        <a:font script="Tibt" typeface="Microsoft Himalaya"/>
+        <a:font script="Thaa" typeface="MV Boli"/>
+        <a:font script="Deva" typeface="Mangal"/>
+        <a:font script="Telu" typeface="Gautami"/>
+        <a:font script="Taml" typeface="Latha"/>
+        <a:font script="Syrc" typeface="Estrangelo Edessa"/>
+        <a:font script="Orya" typeface="Kalinga"/>
+        <a:font script="Mlym" typeface="Kartika"/>
+        <a:font script="Laoo" typeface="DokChampa"/>
+        <a:font script="Sinh" typeface="Iskoola Pota"/>
+        <a:font script="Mong" typeface="Mongolian Baiti"/>
+        <a:font script="Viet" typeface="Arial"/>
+        <a:font script="Uigh" typeface="Microsoft Uighur"/>
+        <a:font script="Geor" typeface="Sylfaen"/>
+        <a:font script="Armn" typeface="Arial"/>
+        <a:font script="Bugi" typeface="Leelawadee UI"/>
+        <a:font script="Bopo" typeface="Microsoft JhengHei"/>
+        <a:font script="Java" typeface="Javanese Text"/>
+        <a:font script="Lisu" typeface="Segoe UI"/>
+        <a:font script="Mymr" typeface="Myanmar Text"/>
+        <a:font script="Nkoo" typeface="Ebrima"/>
+        <a:font script="Olck" typeface="Nirmala UI"/>
+        <a:font script="Osma" typeface="Ebrima"/>
+        <a:font script="Phag" typeface="Phagspa"/>
+        <a:font script="Syrn" typeface="Estrangelo Edessa"/>
+        <a:font script="Syrj" typeface="Estrangelo Edessa"/>
+        <a:font script="Syre" typeface="Estrangelo Edessa"/>
+        <a:font script="Sora" typeface="Nirmala UI"/>
+        <a:font script="Tale" typeface="Microsoft Tai Le"/>
+        <a:font script="Talu" typeface="Microsoft New Tai Lue"/>
+        <a:font script="Tfng" typeface="Ebrima"/>
+      </a:minorFont>
+    </a:fontScheme>
+    <a:fmtScheme name="Office">
+      <a:fillStyleLst>
+        <a:solidFill>
+          <a:schemeClr val="phClr"/>
+        </a:solidFill>
+        <a:gradFill rotWithShape="1">
+          <a:gsLst>
+            <a:gs pos="0">
+              <a:schemeClr val="phClr">
+                <a:lumMod val="110000"/>
+                <a:satMod val="105000"/>
+                <a:tint val="67000"/>
+              </a:schemeClr>
+            </a:gs>
+            <a:gs pos="50000">
+              <a:schemeClr val="phClr">
+                <a:lumMod val="105000"/>
+                <a:satMod val="103000"/>
+                <a:tint val="73000"/>
+              </a:schemeClr>
+            </a:gs>
+            <a:gs pos="100000">
+              <a:schemeClr val="phClr">
+                <a:lumMod val="105000"/>
+                <a:satMod val="109000"/>
+                <a:tint val="81000"/>
+              </a:schemeClr>
+            </a:gs>
+          </a:gsLst>
+          <a:lin ang="5400000" scaled="0"/>
+        </a:gradFill>
+        <a:gradFill rotWithShape="1">
+          <a:gsLst>
+            <a:gs pos="0">
+              <a:schemeClr val="phClr">
+                <a:satMod val="103000"/>
+                <a:lumMod val="102000"/>
+                <a:tint val="94000"/>
+              </a:schemeClr>
+            </a:gs>
+            <a:gs pos="50000">
+              <a:schemeClr val="phClr">
+                <a:satMod val="110000"/>
+                <a:lumMod val="100000"/>
+                <a:shade val="100000"/>
+              </a:schemeClr>
+            </a:gs>
+            <a:gs pos="100000">
+              <a:schemeClr val="phClr">
+                <a:lumMod val="99000"/>
+                <a:satMod val="120000"/>
+                <a:shade val="78000"/>
+              </a:schemeClr>
+            </a:gs>
+          </a:gsLst>
+          <a:lin ang="5400000" scaled="0"/>
+        </a:gradFill>
+      </a:fillStyleLst>
+      <a:lnStyleLst>
+        <a:ln w="12700" cap="flat" cmpd="sng" algn="ctr">
+          <a:solidFill>
+            <a:schemeClr val="phClr"/>
+          </a:solidFill>
+          <a:prstDash val="solid"/>
+          <a:miter lim="800000"/>
+        </a:ln>
+        <a:ln w="19050" cap="flat" cmpd="sng" algn="ctr">
+          <a:solidFill>
+            <a:schemeClr val="phClr"/>
+          </a:solidFill>
+          <a:prstDash val="solid"/>
+          <a:miter lim="800000"/>
+        </a:ln>
+        <a:ln w="25400" cap="flat" cmpd="sng" algn="ctr">
+          <a:solidFill>
+            <a:schemeClr val="phClr"/>
+          </a:solidFill>
+          <a:prstDash val="solid"/>
+          <a:miter lim="800000"/>
+        </a:ln>
+      </a:lnStyleLst>
+      <a:effectStyleLst>
+        <a:effectStyle>
+          <a:effectLst/>
+        </a:effectStyle>
+        <a:effectStyle>
+          <a:effectLst/>
+        </a:effectStyle>
+        <a:effectStyle>
+          <a:effectLst>
+            <a:outerShdw blurRad="57150" dist="19050" dir="5400000" algn="ctr" rotWithShape="0">
+              <a:srgbClr val="000000">
+                <a:alpha val="63000"/>
+              </a:srgbClr>
+            </a:outerShdw>
+          </a:effectLst>
+        </a:effectStyle>
+      </a:effectStyleLst>
+      <a:bgFillStyleLst>
+        <a:solidFill>
+          <a:schemeClr val="phClr"/>
+        </a:solidFill>
+        <a:solidFill>
+          <a:schemeClr val="phClr">
+            <a:tint val="95000"/>
+            <a:satMod val="170000"/>
+          </a:schemeClr>
+        </a:solidFill>
+        <a:gradFill rotWithShape="1">
+          <a:gsLst>
+            <a:gs pos="0">
+              <a:schemeClr val="phClr">
+                <a:tint val="93000"/>
+                <a:satMod val="150000"/>
+                <a:shade val="98000"/>
+                <a:lumMod val="102000"/>
+              </a:schemeClr>
+            </a:gs>
+            <a:gs pos="50000">
+              <a:schemeClr val="phClr">
+                <a:tint val="98000"/>
+                <a:satMod val="130000"/>
+                <a:shade val="90000"/>
+                <a:lumMod val="103000"/>
+              </a:schemeClr>
+            </a:gs>
+            <a:gs pos="100000">
+              <a:schemeClr val="phClr">
+                <a:shade val="63000"/>
+                <a:satMod val="120000"/>
+              </a:schemeClr>
+            </a:gs>
+          </a:gsLst>
+          <a:lin ang="5400000" scaled="0"/>
+        </a:gradFill>
+      </a:bgFillStyleLst>
+    </a:fmtScheme>
+  </a:themeElements>
+  <a:objectDefaults>
+    <a:lnDef>
+      <a:spPr/>
+      <a:bodyPr/>
+      <a:lstStyle/>
+      <a:style>
+        <a:lnRef idx="2">
+          <a:schemeClr val="accent1"/>
+        </a:lnRef>
+        <a:fillRef idx="0">
+          <a:schemeClr val="accent1"/>
+        </a:fillRef>
+        <a:effectRef idx="1">
+          <a:schemeClr val="accent1"/>
+        </a:effectRef>
+        <a:fontRef idx="minor">
+          <a:schemeClr val="tx1"/>
+        </a:fontRef>
+      </a:style>
+    </a:lnDef>
+  </a:objectDefaults>
+  <a:extraClrSchemeLst/>
+  <a:extLst>
+    <a:ext uri="{05A4C25C-085E-4340-85A3-A5531E510DB2}">
+      <thm15:themeFamily xmlns:thm15="http://schemas.microsoft.com/office/thememl/2012/main" name="Office Theme" id="{2E142A2C-CD16-42D6-873A-C26D2A0506FA}" vid="{1BDDFF52-6CD6-40A5-AB3C-68EB2F1E4D0A}"/>
+    </a:ext>
+  </a:extLst>
+</a:theme>
 </file>